--- a/Data/Figure1_CohortSelection.pptx
+++ b/Data/Figure1_CohortSelection.pptx
@@ -5,9 +5,10 @@
     <p:sldMasterId id="2147483648" r:id="rId1"/>
   </p:sldMasterIdLst>
   <p:sldIdLst>
-    <p:sldId id="256" r:id="rId7"/>
+    <p:sldId id="256" r:id="rId2"/>
+    <p:sldId id="257" r:id="rId3"/>
   </p:sldIdLst>
-  <p:sldSz cx="12188952" cy="6858000" type="screen4x3"/>
+  <p:sldSz cx="12188825" cy="6858000"/>
   <p:notesSz cx="6858000" cy="9144000"/>
   <p:defaultTextStyle>
     <a:defPPr>
@@ -104,6 +105,22 @@
       </a:defRPr>
     </a:lvl9pPr>
   </p:defaultTextStyle>
+  <p:extLst>
+    <p:ext uri="{EFAFB233-063F-42B5-8137-9DF3F51BA10A}">
+      <p15:sldGuideLst xmlns:p15="http://schemas.microsoft.com/office/powerpoint/2012/main">
+        <p15:guide id="1" orient="horz" pos="2160">
+          <p15:clr>
+            <a:srgbClr val="A4A3A4"/>
+          </p15:clr>
+        </p15:guide>
+        <p15:guide id="2" pos="2880">
+          <p15:clr>
+            <a:srgbClr val="A4A3A4"/>
+          </p15:clr>
+        </p15:guide>
+      </p15:sldGuideLst>
+    </p:ext>
+  </p:extLst>
 </p:presentation>
 </file>
 
@@ -145,10 +162,9 @@
           <a:lstStyle/>
           <a:p>
             <a:r>
-              <a:rPr lang="en-US" smtClean="0"/>
+              <a:rPr lang="en-US"/>
               <a:t>Click to edit Master title style</a:t>
             </a:r>
-            <a:endParaRPr lang="en-US"/>
           </a:p>
         </p:txBody>
       </p:sp>
@@ -264,10 +280,9 @@
           </a:lstStyle>
           <a:p>
             <a:r>
-              <a:rPr lang="en-US" smtClean="0"/>
+              <a:rPr lang="en-US"/>
               <a:t>Click to edit Master subtitle style</a:t>
             </a:r>
-            <a:endParaRPr lang="en-US"/>
           </a:p>
         </p:txBody>
       </p:sp>
@@ -288,7 +303,7 @@
           <a:p>
             <a:fld id="{5BCAD085-E8A6-8845-BD4E-CB4CCA059FC4}" type="datetimeFigureOut">
               <a:rPr lang="en-US" smtClean="0"/>
-              <a:t>1/27/13</a:t>
+              <a:t>5/8/26</a:t>
             </a:fld>
             <a:endParaRPr lang="en-US"/>
           </a:p>
@@ -382,10 +397,9 @@
           <a:lstStyle/>
           <a:p>
             <a:r>
-              <a:rPr lang="en-US" smtClean="0"/>
+              <a:rPr lang="en-US"/>
               <a:t>Click to edit Master title style</a:t>
             </a:r>
-            <a:endParaRPr lang="en-US"/>
           </a:p>
         </p:txBody>
       </p:sp>
@@ -406,38 +420,37 @@
           <a:p>
             <a:pPr lvl="0"/>
             <a:r>
-              <a:rPr lang="en-US" smtClean="0"/>
+              <a:rPr lang="en-US"/>
               <a:t>Click to edit Master text styles</a:t>
             </a:r>
           </a:p>
           <a:p>
             <a:pPr lvl="1"/>
             <a:r>
-              <a:rPr lang="en-US" smtClean="0"/>
+              <a:rPr lang="en-US"/>
               <a:t>Second level</a:t>
             </a:r>
           </a:p>
           <a:p>
             <a:pPr lvl="2"/>
             <a:r>
-              <a:rPr lang="en-US" smtClean="0"/>
+              <a:rPr lang="en-US"/>
               <a:t>Third level</a:t>
             </a:r>
           </a:p>
           <a:p>
             <a:pPr lvl="3"/>
             <a:r>
-              <a:rPr lang="en-US" smtClean="0"/>
+              <a:rPr lang="en-US"/>
               <a:t>Fourth level</a:t>
             </a:r>
           </a:p>
           <a:p>
             <a:pPr lvl="4"/>
             <a:r>
-              <a:rPr lang="en-US" smtClean="0"/>
+              <a:rPr lang="en-US"/>
               <a:t>Fifth level</a:t>
             </a:r>
-            <a:endParaRPr lang="en-US"/>
           </a:p>
         </p:txBody>
       </p:sp>
@@ -458,7 +471,7 @@
           <a:p>
             <a:fld id="{5BCAD085-E8A6-8845-BD4E-CB4CCA059FC4}" type="datetimeFigureOut">
               <a:rPr lang="en-US" smtClean="0"/>
-              <a:t>1/27/13</a:t>
+              <a:t>5/8/26</a:t>
             </a:fld>
             <a:endParaRPr lang="en-US"/>
           </a:p>
@@ -557,10 +570,9 @@
           <a:lstStyle/>
           <a:p>
             <a:r>
-              <a:rPr lang="en-US" smtClean="0"/>
+              <a:rPr lang="en-US"/>
               <a:t>Click to edit Master title style</a:t>
             </a:r>
-            <a:endParaRPr lang="en-US"/>
           </a:p>
         </p:txBody>
       </p:sp>
@@ -586,38 +598,37 @@
           <a:p>
             <a:pPr lvl="0"/>
             <a:r>
-              <a:rPr lang="en-US" smtClean="0"/>
+              <a:rPr lang="en-US"/>
               <a:t>Click to edit Master text styles</a:t>
             </a:r>
           </a:p>
           <a:p>
             <a:pPr lvl="1"/>
             <a:r>
-              <a:rPr lang="en-US" smtClean="0"/>
+              <a:rPr lang="en-US"/>
               <a:t>Second level</a:t>
             </a:r>
           </a:p>
           <a:p>
             <a:pPr lvl="2"/>
             <a:r>
-              <a:rPr lang="en-US" smtClean="0"/>
+              <a:rPr lang="en-US"/>
               <a:t>Third level</a:t>
             </a:r>
           </a:p>
           <a:p>
             <a:pPr lvl="3"/>
             <a:r>
-              <a:rPr lang="en-US" smtClean="0"/>
+              <a:rPr lang="en-US"/>
               <a:t>Fourth level</a:t>
             </a:r>
           </a:p>
           <a:p>
             <a:pPr lvl="4"/>
             <a:r>
-              <a:rPr lang="en-US" smtClean="0"/>
+              <a:rPr lang="en-US"/>
               <a:t>Fifth level</a:t>
             </a:r>
-            <a:endParaRPr lang="en-US"/>
           </a:p>
         </p:txBody>
       </p:sp>
@@ -638,7 +649,7 @@
           <a:p>
             <a:fld id="{5BCAD085-E8A6-8845-BD4E-CB4CCA059FC4}" type="datetimeFigureOut">
               <a:rPr lang="en-US" smtClean="0"/>
-              <a:t>1/27/13</a:t>
+              <a:t>5/8/26</a:t>
             </a:fld>
             <a:endParaRPr lang="en-US"/>
           </a:p>
@@ -732,10 +743,9 @@
           <a:lstStyle/>
           <a:p>
             <a:r>
-              <a:rPr lang="en-US" smtClean="0"/>
+              <a:rPr lang="en-US"/>
               <a:t>Click to edit Master title style</a:t>
             </a:r>
-            <a:endParaRPr lang="en-US"/>
           </a:p>
         </p:txBody>
       </p:sp>
@@ -756,38 +766,37 @@
           <a:p>
             <a:pPr lvl="0"/>
             <a:r>
-              <a:rPr lang="en-US" smtClean="0"/>
+              <a:rPr lang="en-US"/>
               <a:t>Click to edit Master text styles</a:t>
             </a:r>
           </a:p>
           <a:p>
             <a:pPr lvl="1"/>
             <a:r>
-              <a:rPr lang="en-US" smtClean="0"/>
+              <a:rPr lang="en-US"/>
               <a:t>Second level</a:t>
             </a:r>
           </a:p>
           <a:p>
             <a:pPr lvl="2"/>
             <a:r>
-              <a:rPr lang="en-US" smtClean="0"/>
+              <a:rPr lang="en-US"/>
               <a:t>Third level</a:t>
             </a:r>
           </a:p>
           <a:p>
             <a:pPr lvl="3"/>
             <a:r>
-              <a:rPr lang="en-US" smtClean="0"/>
+              <a:rPr lang="en-US"/>
               <a:t>Fourth level</a:t>
             </a:r>
           </a:p>
           <a:p>
             <a:pPr lvl="4"/>
             <a:r>
-              <a:rPr lang="en-US" smtClean="0"/>
+              <a:rPr lang="en-US"/>
               <a:t>Fifth level</a:t>
             </a:r>
-            <a:endParaRPr lang="en-US"/>
           </a:p>
         </p:txBody>
       </p:sp>
@@ -808,7 +817,7 @@
           <a:p>
             <a:fld id="{5BCAD085-E8A6-8845-BD4E-CB4CCA059FC4}" type="datetimeFigureOut">
               <a:rPr lang="en-US" smtClean="0"/>
-              <a:t>1/27/13</a:t>
+              <a:t>5/8/26</a:t>
             </a:fld>
             <a:endParaRPr lang="en-US"/>
           </a:p>
@@ -911,10 +920,9 @@
           </a:lstStyle>
           <a:p>
             <a:r>
-              <a:rPr lang="en-US" smtClean="0"/>
+              <a:rPr lang="en-US"/>
               <a:t>Click to edit Master title style</a:t>
             </a:r>
-            <a:endParaRPr lang="en-US"/>
           </a:p>
         </p:txBody>
       </p:sp>
@@ -1031,7 +1039,7 @@
           <a:p>
             <a:pPr lvl="0"/>
             <a:r>
-              <a:rPr lang="en-US" smtClean="0"/>
+              <a:rPr lang="en-US"/>
               <a:t>Click to edit Master text styles</a:t>
             </a:r>
           </a:p>
@@ -1054,7 +1062,7 @@
           <a:p>
             <a:fld id="{5BCAD085-E8A6-8845-BD4E-CB4CCA059FC4}" type="datetimeFigureOut">
               <a:rPr lang="en-US" smtClean="0"/>
-              <a:t>1/27/13</a:t>
+              <a:t>5/8/26</a:t>
             </a:fld>
             <a:endParaRPr lang="en-US"/>
           </a:p>
@@ -1148,10 +1156,9 @@
           <a:lstStyle/>
           <a:p>
             <a:r>
-              <a:rPr lang="en-US" smtClean="0"/>
+              <a:rPr lang="en-US"/>
               <a:t>Click to edit Master title style</a:t>
             </a:r>
-            <a:endParaRPr lang="en-US"/>
           </a:p>
         </p:txBody>
       </p:sp>
@@ -1205,38 +1212,37 @@
           <a:p>
             <a:pPr lvl="0"/>
             <a:r>
-              <a:rPr lang="en-US" smtClean="0"/>
+              <a:rPr lang="en-US"/>
               <a:t>Click to edit Master text styles</a:t>
             </a:r>
           </a:p>
           <a:p>
             <a:pPr lvl="1"/>
             <a:r>
-              <a:rPr lang="en-US" smtClean="0"/>
+              <a:rPr lang="en-US"/>
               <a:t>Second level</a:t>
             </a:r>
           </a:p>
           <a:p>
             <a:pPr lvl="2"/>
             <a:r>
-              <a:rPr lang="en-US" smtClean="0"/>
+              <a:rPr lang="en-US"/>
               <a:t>Third level</a:t>
             </a:r>
           </a:p>
           <a:p>
             <a:pPr lvl="3"/>
             <a:r>
-              <a:rPr lang="en-US" smtClean="0"/>
+              <a:rPr lang="en-US"/>
               <a:t>Fourth level</a:t>
             </a:r>
           </a:p>
           <a:p>
             <a:pPr lvl="4"/>
             <a:r>
-              <a:rPr lang="en-US" smtClean="0"/>
+              <a:rPr lang="en-US"/>
               <a:t>Fifth level</a:t>
             </a:r>
-            <a:endParaRPr lang="en-US"/>
           </a:p>
         </p:txBody>
       </p:sp>
@@ -1290,38 +1296,37 @@
           <a:p>
             <a:pPr lvl="0"/>
             <a:r>
-              <a:rPr lang="en-US" smtClean="0"/>
+              <a:rPr lang="en-US"/>
               <a:t>Click to edit Master text styles</a:t>
             </a:r>
           </a:p>
           <a:p>
             <a:pPr lvl="1"/>
             <a:r>
-              <a:rPr lang="en-US" smtClean="0"/>
+              <a:rPr lang="en-US"/>
               <a:t>Second level</a:t>
             </a:r>
           </a:p>
           <a:p>
             <a:pPr lvl="2"/>
             <a:r>
-              <a:rPr lang="en-US" smtClean="0"/>
+              <a:rPr lang="en-US"/>
               <a:t>Third level</a:t>
             </a:r>
           </a:p>
           <a:p>
             <a:pPr lvl="3"/>
             <a:r>
-              <a:rPr lang="en-US" smtClean="0"/>
+              <a:rPr lang="en-US"/>
               <a:t>Fourth level</a:t>
             </a:r>
           </a:p>
           <a:p>
             <a:pPr lvl="4"/>
             <a:r>
-              <a:rPr lang="en-US" smtClean="0"/>
+              <a:rPr lang="en-US"/>
               <a:t>Fifth level</a:t>
             </a:r>
-            <a:endParaRPr lang="en-US"/>
           </a:p>
         </p:txBody>
       </p:sp>
@@ -1342,7 +1347,7 @@
           <a:p>
             <a:fld id="{5BCAD085-E8A6-8845-BD4E-CB4CCA059FC4}" type="datetimeFigureOut">
               <a:rPr lang="en-US" smtClean="0"/>
-              <a:t>1/27/13</a:t>
+              <a:t>5/8/26</a:t>
             </a:fld>
             <a:endParaRPr lang="en-US"/>
           </a:p>
@@ -1440,10 +1445,9 @@
           </a:lstStyle>
           <a:p>
             <a:r>
-              <a:rPr lang="en-US" smtClean="0"/>
+              <a:rPr lang="en-US"/>
               <a:t>Click to edit Master title style</a:t>
             </a:r>
-            <a:endParaRPr lang="en-US"/>
           </a:p>
         </p:txBody>
       </p:sp>
@@ -1506,7 +1510,7 @@
           <a:p>
             <a:pPr lvl="0"/>
             <a:r>
-              <a:rPr lang="en-US" smtClean="0"/>
+              <a:rPr lang="en-US"/>
               <a:t>Click to edit Master text styles</a:t>
             </a:r>
           </a:p>
@@ -1562,38 +1566,37 @@
           <a:p>
             <a:pPr lvl="0"/>
             <a:r>
-              <a:rPr lang="en-US" smtClean="0"/>
+              <a:rPr lang="en-US"/>
               <a:t>Click to edit Master text styles</a:t>
             </a:r>
           </a:p>
           <a:p>
             <a:pPr lvl="1"/>
             <a:r>
-              <a:rPr lang="en-US" smtClean="0"/>
+              <a:rPr lang="en-US"/>
               <a:t>Second level</a:t>
             </a:r>
           </a:p>
           <a:p>
             <a:pPr lvl="2"/>
             <a:r>
-              <a:rPr lang="en-US" smtClean="0"/>
+              <a:rPr lang="en-US"/>
               <a:t>Third level</a:t>
             </a:r>
           </a:p>
           <a:p>
             <a:pPr lvl="3"/>
             <a:r>
-              <a:rPr lang="en-US" smtClean="0"/>
+              <a:rPr lang="en-US"/>
               <a:t>Fourth level</a:t>
             </a:r>
           </a:p>
           <a:p>
             <a:pPr lvl="4"/>
             <a:r>
-              <a:rPr lang="en-US" smtClean="0"/>
+              <a:rPr lang="en-US"/>
               <a:t>Fifth level</a:t>
             </a:r>
-            <a:endParaRPr lang="en-US"/>
           </a:p>
         </p:txBody>
       </p:sp>
@@ -1656,7 +1659,7 @@
           <a:p>
             <a:pPr lvl="0"/>
             <a:r>
-              <a:rPr lang="en-US" smtClean="0"/>
+              <a:rPr lang="en-US"/>
               <a:t>Click to edit Master text styles</a:t>
             </a:r>
           </a:p>
@@ -1712,38 +1715,37 @@
           <a:p>
             <a:pPr lvl="0"/>
             <a:r>
-              <a:rPr lang="en-US" smtClean="0"/>
+              <a:rPr lang="en-US"/>
               <a:t>Click to edit Master text styles</a:t>
             </a:r>
           </a:p>
           <a:p>
             <a:pPr lvl="1"/>
             <a:r>
-              <a:rPr lang="en-US" smtClean="0"/>
+              <a:rPr lang="en-US"/>
               <a:t>Second level</a:t>
             </a:r>
           </a:p>
           <a:p>
             <a:pPr lvl="2"/>
             <a:r>
-              <a:rPr lang="en-US" smtClean="0"/>
+              <a:rPr lang="en-US"/>
               <a:t>Third level</a:t>
             </a:r>
           </a:p>
           <a:p>
             <a:pPr lvl="3"/>
             <a:r>
-              <a:rPr lang="en-US" smtClean="0"/>
+              <a:rPr lang="en-US"/>
               <a:t>Fourth level</a:t>
             </a:r>
           </a:p>
           <a:p>
             <a:pPr lvl="4"/>
             <a:r>
-              <a:rPr lang="en-US" smtClean="0"/>
+              <a:rPr lang="en-US"/>
               <a:t>Fifth level</a:t>
             </a:r>
-            <a:endParaRPr lang="en-US"/>
           </a:p>
         </p:txBody>
       </p:sp>
@@ -1764,7 +1766,7 @@
           <a:p>
             <a:fld id="{5BCAD085-E8A6-8845-BD4E-CB4CCA059FC4}" type="datetimeFigureOut">
               <a:rPr lang="en-US" smtClean="0"/>
-              <a:t>1/27/13</a:t>
+              <a:t>5/8/26</a:t>
             </a:fld>
             <a:endParaRPr lang="en-US"/>
           </a:p>
@@ -1858,10 +1860,9 @@
           <a:lstStyle/>
           <a:p>
             <a:r>
-              <a:rPr lang="en-US" smtClean="0"/>
+              <a:rPr lang="en-US"/>
               <a:t>Click to edit Master title style</a:t>
             </a:r>
-            <a:endParaRPr lang="en-US"/>
           </a:p>
         </p:txBody>
       </p:sp>
@@ -1882,7 +1883,7 @@
           <a:p>
             <a:fld id="{5BCAD085-E8A6-8845-BD4E-CB4CCA059FC4}" type="datetimeFigureOut">
               <a:rPr lang="en-US" smtClean="0"/>
-              <a:t>1/27/13</a:t>
+              <a:t>5/8/26</a:t>
             </a:fld>
             <a:endParaRPr lang="en-US"/>
           </a:p>
@@ -1977,7 +1978,7 @@
           <a:p>
             <a:fld id="{5BCAD085-E8A6-8845-BD4E-CB4CCA059FC4}" type="datetimeFigureOut">
               <a:rPr lang="en-US" smtClean="0"/>
-              <a:t>1/27/13</a:t>
+              <a:t>5/8/26</a:t>
             </a:fld>
             <a:endParaRPr lang="en-US"/>
           </a:p>
@@ -2080,10 +2081,9 @@
           </a:lstStyle>
           <a:p>
             <a:r>
-              <a:rPr lang="en-US" smtClean="0"/>
+              <a:rPr lang="en-US"/>
               <a:t>Click to edit Master title style</a:t>
             </a:r>
-            <a:endParaRPr lang="en-US"/>
           </a:p>
         </p:txBody>
       </p:sp>
@@ -2137,38 +2137,37 @@
           <a:p>
             <a:pPr lvl="0"/>
             <a:r>
-              <a:rPr lang="en-US" smtClean="0"/>
+              <a:rPr lang="en-US"/>
               <a:t>Click to edit Master text styles</a:t>
             </a:r>
           </a:p>
           <a:p>
             <a:pPr lvl="1"/>
             <a:r>
-              <a:rPr lang="en-US" smtClean="0"/>
+              <a:rPr lang="en-US"/>
               <a:t>Second level</a:t>
             </a:r>
           </a:p>
           <a:p>
             <a:pPr lvl="2"/>
             <a:r>
-              <a:rPr lang="en-US" smtClean="0"/>
+              <a:rPr lang="en-US"/>
               <a:t>Third level</a:t>
             </a:r>
           </a:p>
           <a:p>
             <a:pPr lvl="3"/>
             <a:r>
-              <a:rPr lang="en-US" smtClean="0"/>
+              <a:rPr lang="en-US"/>
               <a:t>Fourth level</a:t>
             </a:r>
           </a:p>
           <a:p>
             <a:pPr lvl="4"/>
             <a:r>
-              <a:rPr lang="en-US" smtClean="0"/>
+              <a:rPr lang="en-US"/>
               <a:t>Fifth level</a:t>
             </a:r>
-            <a:endParaRPr lang="en-US"/>
           </a:p>
         </p:txBody>
       </p:sp>
@@ -2231,7 +2230,7 @@
           <a:p>
             <a:pPr lvl="0"/>
             <a:r>
-              <a:rPr lang="en-US" smtClean="0"/>
+              <a:rPr lang="en-US"/>
               <a:t>Click to edit Master text styles</a:t>
             </a:r>
           </a:p>
@@ -2254,7 +2253,7 @@
           <a:p>
             <a:fld id="{5BCAD085-E8A6-8845-BD4E-CB4CCA059FC4}" type="datetimeFigureOut">
               <a:rPr lang="en-US" smtClean="0"/>
-              <a:t>1/27/13</a:t>
+              <a:t>5/8/26</a:t>
             </a:fld>
             <a:endParaRPr lang="en-US"/>
           </a:p>
@@ -2357,10 +2356,9 @@
           </a:lstStyle>
           <a:p>
             <a:r>
-              <a:rPr lang="en-US" smtClean="0"/>
+              <a:rPr lang="en-US"/>
               <a:t>Click to edit Master title style</a:t>
             </a:r>
-            <a:endParaRPr lang="en-US"/>
           </a:p>
         </p:txBody>
       </p:sp>
@@ -2484,7 +2482,7 @@
           <a:p>
             <a:pPr lvl="0"/>
             <a:r>
-              <a:rPr lang="en-US" smtClean="0"/>
+              <a:rPr lang="en-US"/>
               <a:t>Click to edit Master text styles</a:t>
             </a:r>
           </a:p>
@@ -2507,7 +2505,7 @@
           <a:p>
             <a:fld id="{5BCAD085-E8A6-8845-BD4E-CB4CCA059FC4}" type="datetimeFigureOut">
               <a:rPr lang="en-US" smtClean="0"/>
-              <a:t>1/27/13</a:t>
+              <a:t>5/8/26</a:t>
             </a:fld>
             <a:endParaRPr lang="en-US"/>
           </a:p>
@@ -2616,10 +2614,9 @@
           <a:lstStyle/>
           <a:p>
             <a:r>
-              <a:rPr lang="en-US" smtClean="0"/>
+              <a:rPr lang="en-US"/>
               <a:t>Click to edit Master title style</a:t>
             </a:r>
-            <a:endParaRPr lang="en-US"/>
           </a:p>
         </p:txBody>
       </p:sp>
@@ -2650,38 +2647,37 @@
           <a:p>
             <a:pPr lvl="0"/>
             <a:r>
-              <a:rPr lang="en-US" smtClean="0"/>
+              <a:rPr lang="en-US"/>
               <a:t>Click to edit Master text styles</a:t>
             </a:r>
           </a:p>
           <a:p>
             <a:pPr lvl="1"/>
             <a:r>
-              <a:rPr lang="en-US" smtClean="0"/>
+              <a:rPr lang="en-US"/>
               <a:t>Second level</a:t>
             </a:r>
           </a:p>
           <a:p>
             <a:pPr lvl="2"/>
             <a:r>
-              <a:rPr lang="en-US" smtClean="0"/>
+              <a:rPr lang="en-US"/>
               <a:t>Third level</a:t>
             </a:r>
           </a:p>
           <a:p>
             <a:pPr lvl="3"/>
             <a:r>
-              <a:rPr lang="en-US" smtClean="0"/>
+              <a:rPr lang="en-US"/>
               <a:t>Fourth level</a:t>
             </a:r>
           </a:p>
           <a:p>
             <a:pPr lvl="4"/>
             <a:r>
-              <a:rPr lang="en-US" smtClean="0"/>
+              <a:rPr lang="en-US"/>
               <a:t>Fifth level</a:t>
             </a:r>
-            <a:endParaRPr lang="en-US"/>
           </a:p>
         </p:txBody>
       </p:sp>
@@ -2720,7 +2716,7 @@
           <a:p>
             <a:fld id="{5BCAD085-E8A6-8845-BD4E-CB4CCA059FC4}" type="datetimeFigureOut">
               <a:rPr lang="en-US" smtClean="0"/>
-              <a:t>1/27/13</a:t>
+              <a:t>5/8/26</a:t>
             </a:fld>
             <a:endParaRPr lang="en-US"/>
           </a:p>
@@ -3079,7 +3075,7 @@
 </file>
 
 <file path=ppt/slides/slide1.xml><?xml version="1.0" encoding="utf-8"?>
-<p:sld xmlns:a="http://schemas.openxmlformats.org/drawingml/2006/main" xmlns:p="http://schemas.openxmlformats.org/presentationml/2006/main" xmlns:r="http://schemas.openxmlformats.org/officeDocument/2006/relationships">
+<p:sld xmlns:a="http://schemas.openxmlformats.org/drawingml/2006/main" xmlns:r="http://schemas.openxmlformats.org/officeDocument/2006/relationships" xmlns:p="http://schemas.openxmlformats.org/presentationml/2006/main">
   <p:cSld>
     <p:spTree>
       <p:nvGrpSpPr>
@@ -3087,7 +3083,14 @@
         <p:cNvGrpSpPr/>
         <p:nvPr/>
       </p:nvGrpSpPr>
-      <p:grpSpPr/>
+      <p:grpSpPr>
+        <a:xfrm>
+          <a:off x="0" y="0"/>
+          <a:ext cx="0" cy="0"/>
+          <a:chOff x="0" y="0"/>
+          <a:chExt cx="0" cy="0"/>
+        </a:xfrm>
+      </p:grpSpPr>
       <p:sp>
         <p:nvSpPr>
           <p:cNvPr id="2" name="Rounded Rectangle 1"/>
@@ -3126,7 +3129,7 @@
           </a:fontRef>
         </p:style>
         <p:txBody>
-          <a:bodyPr rtlCol="0" anchor="ctr" wrap="square"/>
+          <a:bodyPr wrap="square" rtlCol="0" anchor="ctr"/>
           <a:lstStyle/>
           <a:p>
             <a:pPr algn="ctr"/>
@@ -3228,7 +3231,7 @@
           </a:fontRef>
         </p:style>
         <p:txBody>
-          <a:bodyPr rtlCol="0" anchor="ctr" wrap="square"/>
+          <a:bodyPr wrap="square" rtlCol="0" anchor="ctr"/>
           <a:lstStyle/>
           <a:p>
             <a:pPr algn="ctr"/>
@@ -3366,7 +3369,7 @@
           </a:fontRef>
         </p:style>
         <p:txBody>
-          <a:bodyPr rtlCol="0" anchor="ctr" wrap="square"/>
+          <a:bodyPr wrap="square" rtlCol="0" anchor="ctr"/>
           <a:lstStyle/>
           <a:p>
             <a:pPr algn="ctr"/>
@@ -3377,7 +3380,25 @@
                 </a:solidFill>
                 <a:latin typeface="Calibri"/>
               </a:rPr>
-              <a:t>COHORT A — Safety</a:t>
+              <a:t>COHORT A — </a:t>
+            </a:r>
+            <a:r>
+              <a:rPr lang="en-US" sz="1600" b="1">
+                <a:solidFill>
+                  <a:srgbClr val="222222"/>
+                </a:solidFill>
+                <a:latin typeface="Calibri"/>
+              </a:rPr>
+              <a:t>Long-term </a:t>
+            </a:r>
+            <a:r>
+              <a:rPr sz="1600" b="1">
+                <a:solidFill>
+                  <a:srgbClr val="222222"/>
+                </a:solidFill>
+                <a:latin typeface="Calibri"/>
+              </a:rPr>
+              <a:t>Safety</a:t>
             </a:r>
           </a:p>
         </p:txBody>
@@ -3420,7 +3441,7 @@
           </a:fontRef>
         </p:style>
         <p:txBody>
-          <a:bodyPr rtlCol="0" anchor="ctr" wrap="square"/>
+          <a:bodyPr wrap="square" rtlCol="0" anchor="ctr"/>
           <a:lstStyle/>
           <a:p>
             <a:pPr algn="ctr"/>
@@ -3431,7 +3452,25 @@
                 </a:solidFill>
                 <a:latin typeface="Calibri"/>
               </a:rPr>
-              <a:t>COHORT B — Efficacy</a:t>
+              <a:t>COHORT B — </a:t>
+            </a:r>
+            <a:r>
+              <a:rPr lang="en-US" sz="1600" b="1">
+                <a:solidFill>
+                  <a:srgbClr val="222222"/>
+                </a:solidFill>
+                <a:latin typeface="Calibri"/>
+              </a:rPr>
+              <a:t>Post-surgical </a:t>
+            </a:r>
+            <a:r>
+              <a:rPr sz="1600" b="1">
+                <a:solidFill>
+                  <a:srgbClr val="222222"/>
+                </a:solidFill>
+                <a:latin typeface="Calibri"/>
+              </a:rPr>
+              <a:t>Efficacy</a:t>
             </a:r>
           </a:p>
         </p:txBody>
@@ -3510,7 +3549,7 @@
           </a:fontRef>
         </p:style>
         <p:txBody>
-          <a:bodyPr rtlCol="0" anchor="ctr" wrap="square"/>
+          <a:bodyPr wrap="square" rtlCol="0" anchor="ctr"/>
           <a:lstStyle/>
           <a:p>
             <a:pPr algn="ctr"/>
@@ -3612,7 +3651,7 @@
           </a:fontRef>
         </p:style>
         <p:txBody>
-          <a:bodyPr rtlCol="0" anchor="ctr" wrap="square"/>
+          <a:bodyPr wrap="square" rtlCol="0" anchor="ctr"/>
           <a:lstStyle/>
           <a:p>
             <a:pPr algn="ctr"/>
@@ -3714,7 +3753,7 @@
           </a:fontRef>
         </p:style>
         <p:txBody>
-          <a:bodyPr rtlCol="0" anchor="ctr" wrap="square"/>
+          <a:bodyPr wrap="square" rtlCol="0" anchor="ctr"/>
           <a:lstStyle/>
           <a:p>
             <a:pPr algn="ctr"/>
@@ -3754,15 +3793,12 @@
           </a:p>
           <a:p>
             <a:pPr algn="ctr"/>
-            <a:r>
-              <a:rPr sz="1300" b="0">
-                <a:solidFill>
-                  <a:srgbClr val="222222"/>
-                </a:solidFill>
-                <a:latin typeface="Calibri"/>
-              </a:rPr>
-              <a:t/>
-            </a:r>
+            <a:endParaRPr sz="1300" b="0">
+              <a:solidFill>
+                <a:srgbClr val="222222"/>
+              </a:solidFill>
+              <a:latin typeface="Calibri"/>
+            </a:endParaRPr>
           </a:p>
           <a:p>
             <a:pPr algn="ctr"/>
@@ -3852,7 +3888,7 @@
           </a:fontRef>
         </p:style>
         <p:txBody>
-          <a:bodyPr rtlCol="0" anchor="ctr" wrap="square"/>
+          <a:bodyPr wrap="square" rtlCol="0" anchor="ctr"/>
           <a:lstStyle/>
           <a:p>
             <a:pPr algn="ctr"/>
@@ -3954,7 +3990,7 @@
           </a:fontRef>
         </p:style>
         <p:txBody>
-          <a:bodyPr rtlCol="0" anchor="ctr" wrap="square"/>
+          <a:bodyPr wrap="square" rtlCol="0" anchor="ctr"/>
           <a:lstStyle/>
           <a:p>
             <a:pPr algn="ctr"/>
@@ -4056,7 +4092,7 @@
           </a:fontRef>
         </p:style>
         <p:txBody>
-          <a:bodyPr rtlCol="0" anchor="ctr" wrap="square"/>
+          <a:bodyPr wrap="square" rtlCol="0" anchor="ctr"/>
           <a:lstStyle/>
           <a:p>
             <a:pPr algn="ctr"/>
@@ -4096,15 +4132,12 @@
           </a:p>
           <a:p>
             <a:pPr algn="ctr"/>
-            <a:r>
-              <a:rPr sz="1300" b="0">
-                <a:solidFill>
-                  <a:srgbClr val="222222"/>
-                </a:solidFill>
-                <a:latin typeface="Calibri"/>
-              </a:rPr>
-              <a:t/>
-            </a:r>
+            <a:endParaRPr sz="1300" b="0">
+              <a:solidFill>
+                <a:srgbClr val="222222"/>
+              </a:solidFill>
+              <a:latin typeface="Calibri"/>
+            </a:endParaRPr>
           </a:p>
           <a:p>
             <a:pPr algn="ctr"/>
@@ -4121,6 +4154,67 @@
         </p:txBody>
       </p:sp>
     </p:spTree>
+  </p:cSld>
+  <p:clrMapOvr>
+    <a:masterClrMapping/>
+  </p:clrMapOvr>
+</p:sld>
+</file>
+
+<file path=ppt/slides/slide2.xml><?xml version="1.0" encoding="utf-8"?>
+<p:sld xmlns:a="http://schemas.openxmlformats.org/drawingml/2006/main" xmlns:r="http://schemas.openxmlformats.org/officeDocument/2006/relationships" xmlns:p="http://schemas.openxmlformats.org/presentationml/2006/main">
+  <p:cSld>
+    <p:spTree>
+      <p:nvGrpSpPr>
+        <p:cNvPr id="1" name=""/>
+        <p:cNvGrpSpPr/>
+        <p:nvPr/>
+      </p:nvGrpSpPr>
+      <p:grpSpPr>
+        <a:xfrm>
+          <a:off x="0" y="0"/>
+          <a:ext cx="0" cy="0"/>
+          <a:chOff x="0" y="0"/>
+          <a:chExt cx="0" cy="0"/>
+        </a:xfrm>
+      </p:grpSpPr>
+      <p:pic>
+        <p:nvPicPr>
+          <p:cNvPr id="2" name="Figure1_CohortSelection.png" title="Figure1_CohortSelection.png">
+            <a:extLst>
+              <a:ext uri="{FF2B5EF4-FFF2-40B4-BE49-F238E27FC236}">
+                <a16:creationId xmlns:a16="http://schemas.microsoft.com/office/drawing/2014/main" id="{692250DA-55CC-0DD9-14D4-7C7614AEA35C}"/>
+              </a:ext>
+            </a:extLst>
+          </p:cNvPr>
+          <p:cNvPicPr>
+            <a:picLocks noChangeAspect="1"/>
+          </p:cNvPicPr>
+          <p:nvPr/>
+        </p:nvPicPr>
+        <p:blipFill>
+          <a:blip r:embed="rId2"/>
+          <a:srcRect/>
+          <a:stretch>
+            <a:fillRect/>
+          </a:stretch>
+        </p:blipFill>
+        <p:spPr bwMode="auto">
+          <a:xfrm>
+            <a:off x="3236912" y="1290637"/>
+            <a:ext cx="5715000" cy="4276725"/>
+          </a:xfrm>
+          <a:prstGeom prst="rect">
+            <a:avLst/>
+          </a:prstGeom>
+        </p:spPr>
+      </p:pic>
+    </p:spTree>
+    <p:extLst>
+      <p:ext uri="{BB962C8B-B14F-4D97-AF65-F5344CB8AC3E}">
+        <p14:creationId xmlns:p14="http://schemas.microsoft.com/office/powerpoint/2010/main" val="2072521256"/>
+      </p:ext>
+    </p:extLst>
   </p:cSld>
   <p:clrMapOvr>
     <a:masterClrMapping/>

--- a/Data/Figure1_CohortSelection.pptx
+++ b/Data/Figure1_CohortSelection.pptx
@@ -5,10 +5,9 @@
     <p:sldMasterId id="2147483648" r:id="rId1"/>
   </p:sldMasterIdLst>
   <p:sldIdLst>
-    <p:sldId id="256" r:id="rId2"/>
-    <p:sldId id="257" r:id="rId3"/>
+    <p:sldId id="256" r:id="rId7"/>
   </p:sldIdLst>
-  <p:sldSz cx="12188825" cy="6858000"/>
+  <p:sldSz cx="12188952" cy="6858000" type="screen4x3"/>
   <p:notesSz cx="6858000" cy="9144000"/>
   <p:defaultTextStyle>
     <a:defPPr>
@@ -105,22 +104,6 @@
       </a:defRPr>
     </a:lvl9pPr>
   </p:defaultTextStyle>
-  <p:extLst>
-    <p:ext uri="{EFAFB233-063F-42B5-8137-9DF3F51BA10A}">
-      <p15:sldGuideLst xmlns:p15="http://schemas.microsoft.com/office/powerpoint/2012/main">
-        <p15:guide id="1" orient="horz" pos="2160">
-          <p15:clr>
-            <a:srgbClr val="A4A3A4"/>
-          </p15:clr>
-        </p15:guide>
-        <p15:guide id="2" pos="2880">
-          <p15:clr>
-            <a:srgbClr val="A4A3A4"/>
-          </p15:clr>
-        </p15:guide>
-      </p15:sldGuideLst>
-    </p:ext>
-  </p:extLst>
 </p:presentation>
 </file>
 
@@ -162,9 +145,10 @@
           <a:lstStyle/>
           <a:p>
             <a:r>
-              <a:rPr lang="en-US"/>
+              <a:rPr lang="en-US" smtClean="0"/>
               <a:t>Click to edit Master title style</a:t>
             </a:r>
+            <a:endParaRPr lang="en-US"/>
           </a:p>
         </p:txBody>
       </p:sp>
@@ -280,9 +264,10 @@
           </a:lstStyle>
           <a:p>
             <a:r>
-              <a:rPr lang="en-US"/>
+              <a:rPr lang="en-US" smtClean="0"/>
               <a:t>Click to edit Master subtitle style</a:t>
             </a:r>
+            <a:endParaRPr lang="en-US"/>
           </a:p>
         </p:txBody>
       </p:sp>
@@ -303,7 +288,7 @@
           <a:p>
             <a:fld id="{5BCAD085-E8A6-8845-BD4E-CB4CCA059FC4}" type="datetimeFigureOut">
               <a:rPr lang="en-US" smtClean="0"/>
-              <a:t>5/8/26</a:t>
+              <a:t>1/27/13</a:t>
             </a:fld>
             <a:endParaRPr lang="en-US"/>
           </a:p>
@@ -397,9 +382,10 @@
           <a:lstStyle/>
           <a:p>
             <a:r>
-              <a:rPr lang="en-US"/>
+              <a:rPr lang="en-US" smtClean="0"/>
               <a:t>Click to edit Master title style</a:t>
             </a:r>
+            <a:endParaRPr lang="en-US"/>
           </a:p>
         </p:txBody>
       </p:sp>
@@ -420,37 +406,38 @@
           <a:p>
             <a:pPr lvl="0"/>
             <a:r>
-              <a:rPr lang="en-US"/>
+              <a:rPr lang="en-US" smtClean="0"/>
               <a:t>Click to edit Master text styles</a:t>
             </a:r>
           </a:p>
           <a:p>
             <a:pPr lvl="1"/>
             <a:r>
-              <a:rPr lang="en-US"/>
+              <a:rPr lang="en-US" smtClean="0"/>
               <a:t>Second level</a:t>
             </a:r>
           </a:p>
           <a:p>
             <a:pPr lvl="2"/>
             <a:r>
-              <a:rPr lang="en-US"/>
+              <a:rPr lang="en-US" smtClean="0"/>
               <a:t>Third level</a:t>
             </a:r>
           </a:p>
           <a:p>
             <a:pPr lvl="3"/>
             <a:r>
-              <a:rPr lang="en-US"/>
+              <a:rPr lang="en-US" smtClean="0"/>
               <a:t>Fourth level</a:t>
             </a:r>
           </a:p>
           <a:p>
             <a:pPr lvl="4"/>
             <a:r>
-              <a:rPr lang="en-US"/>
+              <a:rPr lang="en-US" smtClean="0"/>
               <a:t>Fifth level</a:t>
             </a:r>
+            <a:endParaRPr lang="en-US"/>
           </a:p>
         </p:txBody>
       </p:sp>
@@ -471,7 +458,7 @@
           <a:p>
             <a:fld id="{5BCAD085-E8A6-8845-BD4E-CB4CCA059FC4}" type="datetimeFigureOut">
               <a:rPr lang="en-US" smtClean="0"/>
-              <a:t>5/8/26</a:t>
+              <a:t>1/27/13</a:t>
             </a:fld>
             <a:endParaRPr lang="en-US"/>
           </a:p>
@@ -570,9 +557,10 @@
           <a:lstStyle/>
           <a:p>
             <a:r>
-              <a:rPr lang="en-US"/>
+              <a:rPr lang="en-US" smtClean="0"/>
               <a:t>Click to edit Master title style</a:t>
             </a:r>
+            <a:endParaRPr lang="en-US"/>
           </a:p>
         </p:txBody>
       </p:sp>
@@ -598,37 +586,38 @@
           <a:p>
             <a:pPr lvl="0"/>
             <a:r>
-              <a:rPr lang="en-US"/>
+              <a:rPr lang="en-US" smtClean="0"/>
               <a:t>Click to edit Master text styles</a:t>
             </a:r>
           </a:p>
           <a:p>
             <a:pPr lvl="1"/>
             <a:r>
-              <a:rPr lang="en-US"/>
+              <a:rPr lang="en-US" smtClean="0"/>
               <a:t>Second level</a:t>
             </a:r>
           </a:p>
           <a:p>
             <a:pPr lvl="2"/>
             <a:r>
-              <a:rPr lang="en-US"/>
+              <a:rPr lang="en-US" smtClean="0"/>
               <a:t>Third level</a:t>
             </a:r>
           </a:p>
           <a:p>
             <a:pPr lvl="3"/>
             <a:r>
-              <a:rPr lang="en-US"/>
+              <a:rPr lang="en-US" smtClean="0"/>
               <a:t>Fourth level</a:t>
             </a:r>
           </a:p>
           <a:p>
             <a:pPr lvl="4"/>
             <a:r>
-              <a:rPr lang="en-US"/>
+              <a:rPr lang="en-US" smtClean="0"/>
               <a:t>Fifth level</a:t>
             </a:r>
+            <a:endParaRPr lang="en-US"/>
           </a:p>
         </p:txBody>
       </p:sp>
@@ -649,7 +638,7 @@
           <a:p>
             <a:fld id="{5BCAD085-E8A6-8845-BD4E-CB4CCA059FC4}" type="datetimeFigureOut">
               <a:rPr lang="en-US" smtClean="0"/>
-              <a:t>5/8/26</a:t>
+              <a:t>1/27/13</a:t>
             </a:fld>
             <a:endParaRPr lang="en-US"/>
           </a:p>
@@ -743,9 +732,10 @@
           <a:lstStyle/>
           <a:p>
             <a:r>
-              <a:rPr lang="en-US"/>
+              <a:rPr lang="en-US" smtClean="0"/>
               <a:t>Click to edit Master title style</a:t>
             </a:r>
+            <a:endParaRPr lang="en-US"/>
           </a:p>
         </p:txBody>
       </p:sp>
@@ -766,37 +756,38 @@
           <a:p>
             <a:pPr lvl="0"/>
             <a:r>
-              <a:rPr lang="en-US"/>
+              <a:rPr lang="en-US" smtClean="0"/>
               <a:t>Click to edit Master text styles</a:t>
             </a:r>
           </a:p>
           <a:p>
             <a:pPr lvl="1"/>
             <a:r>
-              <a:rPr lang="en-US"/>
+              <a:rPr lang="en-US" smtClean="0"/>
               <a:t>Second level</a:t>
             </a:r>
           </a:p>
           <a:p>
             <a:pPr lvl="2"/>
             <a:r>
-              <a:rPr lang="en-US"/>
+              <a:rPr lang="en-US" smtClean="0"/>
               <a:t>Third level</a:t>
             </a:r>
           </a:p>
           <a:p>
             <a:pPr lvl="3"/>
             <a:r>
-              <a:rPr lang="en-US"/>
+              <a:rPr lang="en-US" smtClean="0"/>
               <a:t>Fourth level</a:t>
             </a:r>
           </a:p>
           <a:p>
             <a:pPr lvl="4"/>
             <a:r>
-              <a:rPr lang="en-US"/>
+              <a:rPr lang="en-US" smtClean="0"/>
               <a:t>Fifth level</a:t>
             </a:r>
+            <a:endParaRPr lang="en-US"/>
           </a:p>
         </p:txBody>
       </p:sp>
@@ -817,7 +808,7 @@
           <a:p>
             <a:fld id="{5BCAD085-E8A6-8845-BD4E-CB4CCA059FC4}" type="datetimeFigureOut">
               <a:rPr lang="en-US" smtClean="0"/>
-              <a:t>5/8/26</a:t>
+              <a:t>1/27/13</a:t>
             </a:fld>
             <a:endParaRPr lang="en-US"/>
           </a:p>
@@ -920,9 +911,10 @@
           </a:lstStyle>
           <a:p>
             <a:r>
-              <a:rPr lang="en-US"/>
+              <a:rPr lang="en-US" smtClean="0"/>
               <a:t>Click to edit Master title style</a:t>
             </a:r>
+            <a:endParaRPr lang="en-US"/>
           </a:p>
         </p:txBody>
       </p:sp>
@@ -1039,7 +1031,7 @@
           <a:p>
             <a:pPr lvl="0"/>
             <a:r>
-              <a:rPr lang="en-US"/>
+              <a:rPr lang="en-US" smtClean="0"/>
               <a:t>Click to edit Master text styles</a:t>
             </a:r>
           </a:p>
@@ -1062,7 +1054,7 @@
           <a:p>
             <a:fld id="{5BCAD085-E8A6-8845-BD4E-CB4CCA059FC4}" type="datetimeFigureOut">
               <a:rPr lang="en-US" smtClean="0"/>
-              <a:t>5/8/26</a:t>
+              <a:t>1/27/13</a:t>
             </a:fld>
             <a:endParaRPr lang="en-US"/>
           </a:p>
@@ -1156,9 +1148,10 @@
           <a:lstStyle/>
           <a:p>
             <a:r>
-              <a:rPr lang="en-US"/>
+              <a:rPr lang="en-US" smtClean="0"/>
               <a:t>Click to edit Master title style</a:t>
             </a:r>
+            <a:endParaRPr lang="en-US"/>
           </a:p>
         </p:txBody>
       </p:sp>
@@ -1212,37 +1205,38 @@
           <a:p>
             <a:pPr lvl="0"/>
             <a:r>
-              <a:rPr lang="en-US"/>
+              <a:rPr lang="en-US" smtClean="0"/>
               <a:t>Click to edit Master text styles</a:t>
             </a:r>
           </a:p>
           <a:p>
             <a:pPr lvl="1"/>
             <a:r>
-              <a:rPr lang="en-US"/>
+              <a:rPr lang="en-US" smtClean="0"/>
               <a:t>Second level</a:t>
             </a:r>
           </a:p>
           <a:p>
             <a:pPr lvl="2"/>
             <a:r>
-              <a:rPr lang="en-US"/>
+              <a:rPr lang="en-US" smtClean="0"/>
               <a:t>Third level</a:t>
             </a:r>
           </a:p>
           <a:p>
             <a:pPr lvl="3"/>
             <a:r>
-              <a:rPr lang="en-US"/>
+              <a:rPr lang="en-US" smtClean="0"/>
               <a:t>Fourth level</a:t>
             </a:r>
           </a:p>
           <a:p>
             <a:pPr lvl="4"/>
             <a:r>
-              <a:rPr lang="en-US"/>
+              <a:rPr lang="en-US" smtClean="0"/>
               <a:t>Fifth level</a:t>
             </a:r>
+            <a:endParaRPr lang="en-US"/>
           </a:p>
         </p:txBody>
       </p:sp>
@@ -1296,37 +1290,38 @@
           <a:p>
             <a:pPr lvl="0"/>
             <a:r>
-              <a:rPr lang="en-US"/>
+              <a:rPr lang="en-US" smtClean="0"/>
               <a:t>Click to edit Master text styles</a:t>
             </a:r>
           </a:p>
           <a:p>
             <a:pPr lvl="1"/>
             <a:r>
-              <a:rPr lang="en-US"/>
+              <a:rPr lang="en-US" smtClean="0"/>
               <a:t>Second level</a:t>
             </a:r>
           </a:p>
           <a:p>
             <a:pPr lvl="2"/>
             <a:r>
-              <a:rPr lang="en-US"/>
+              <a:rPr lang="en-US" smtClean="0"/>
               <a:t>Third level</a:t>
             </a:r>
           </a:p>
           <a:p>
             <a:pPr lvl="3"/>
             <a:r>
-              <a:rPr lang="en-US"/>
+              <a:rPr lang="en-US" smtClean="0"/>
               <a:t>Fourth level</a:t>
             </a:r>
           </a:p>
           <a:p>
             <a:pPr lvl="4"/>
             <a:r>
-              <a:rPr lang="en-US"/>
+              <a:rPr lang="en-US" smtClean="0"/>
               <a:t>Fifth level</a:t>
             </a:r>
+            <a:endParaRPr lang="en-US"/>
           </a:p>
         </p:txBody>
       </p:sp>
@@ -1347,7 +1342,7 @@
           <a:p>
             <a:fld id="{5BCAD085-E8A6-8845-BD4E-CB4CCA059FC4}" type="datetimeFigureOut">
               <a:rPr lang="en-US" smtClean="0"/>
-              <a:t>5/8/26</a:t>
+              <a:t>1/27/13</a:t>
             </a:fld>
             <a:endParaRPr lang="en-US"/>
           </a:p>
@@ -1445,9 +1440,10 @@
           </a:lstStyle>
           <a:p>
             <a:r>
-              <a:rPr lang="en-US"/>
+              <a:rPr lang="en-US" smtClean="0"/>
               <a:t>Click to edit Master title style</a:t>
             </a:r>
+            <a:endParaRPr lang="en-US"/>
           </a:p>
         </p:txBody>
       </p:sp>
@@ -1510,7 +1506,7 @@
           <a:p>
             <a:pPr lvl="0"/>
             <a:r>
-              <a:rPr lang="en-US"/>
+              <a:rPr lang="en-US" smtClean="0"/>
               <a:t>Click to edit Master text styles</a:t>
             </a:r>
           </a:p>
@@ -1566,37 +1562,38 @@
           <a:p>
             <a:pPr lvl="0"/>
             <a:r>
-              <a:rPr lang="en-US"/>
+              <a:rPr lang="en-US" smtClean="0"/>
               <a:t>Click to edit Master text styles</a:t>
             </a:r>
           </a:p>
           <a:p>
             <a:pPr lvl="1"/>
             <a:r>
-              <a:rPr lang="en-US"/>
+              <a:rPr lang="en-US" smtClean="0"/>
               <a:t>Second level</a:t>
             </a:r>
           </a:p>
           <a:p>
             <a:pPr lvl="2"/>
             <a:r>
-              <a:rPr lang="en-US"/>
+              <a:rPr lang="en-US" smtClean="0"/>
               <a:t>Third level</a:t>
             </a:r>
           </a:p>
           <a:p>
             <a:pPr lvl="3"/>
             <a:r>
-              <a:rPr lang="en-US"/>
+              <a:rPr lang="en-US" smtClean="0"/>
               <a:t>Fourth level</a:t>
             </a:r>
           </a:p>
           <a:p>
             <a:pPr lvl="4"/>
             <a:r>
-              <a:rPr lang="en-US"/>
+              <a:rPr lang="en-US" smtClean="0"/>
               <a:t>Fifth level</a:t>
             </a:r>
+            <a:endParaRPr lang="en-US"/>
           </a:p>
         </p:txBody>
       </p:sp>
@@ -1659,7 +1656,7 @@
           <a:p>
             <a:pPr lvl="0"/>
             <a:r>
-              <a:rPr lang="en-US"/>
+              <a:rPr lang="en-US" smtClean="0"/>
               <a:t>Click to edit Master text styles</a:t>
             </a:r>
           </a:p>
@@ -1715,37 +1712,38 @@
           <a:p>
             <a:pPr lvl="0"/>
             <a:r>
-              <a:rPr lang="en-US"/>
+              <a:rPr lang="en-US" smtClean="0"/>
               <a:t>Click to edit Master text styles</a:t>
             </a:r>
           </a:p>
           <a:p>
             <a:pPr lvl="1"/>
             <a:r>
-              <a:rPr lang="en-US"/>
+              <a:rPr lang="en-US" smtClean="0"/>
               <a:t>Second level</a:t>
             </a:r>
           </a:p>
           <a:p>
             <a:pPr lvl="2"/>
             <a:r>
-              <a:rPr lang="en-US"/>
+              <a:rPr lang="en-US" smtClean="0"/>
               <a:t>Third level</a:t>
             </a:r>
           </a:p>
           <a:p>
             <a:pPr lvl="3"/>
             <a:r>
-              <a:rPr lang="en-US"/>
+              <a:rPr lang="en-US" smtClean="0"/>
               <a:t>Fourth level</a:t>
             </a:r>
           </a:p>
           <a:p>
             <a:pPr lvl="4"/>
             <a:r>
-              <a:rPr lang="en-US"/>
+              <a:rPr lang="en-US" smtClean="0"/>
               <a:t>Fifth level</a:t>
             </a:r>
+            <a:endParaRPr lang="en-US"/>
           </a:p>
         </p:txBody>
       </p:sp>
@@ -1766,7 +1764,7 @@
           <a:p>
             <a:fld id="{5BCAD085-E8A6-8845-BD4E-CB4CCA059FC4}" type="datetimeFigureOut">
               <a:rPr lang="en-US" smtClean="0"/>
-              <a:t>5/8/26</a:t>
+              <a:t>1/27/13</a:t>
             </a:fld>
             <a:endParaRPr lang="en-US"/>
           </a:p>
@@ -1860,9 +1858,10 @@
           <a:lstStyle/>
           <a:p>
             <a:r>
-              <a:rPr lang="en-US"/>
+              <a:rPr lang="en-US" smtClean="0"/>
               <a:t>Click to edit Master title style</a:t>
             </a:r>
+            <a:endParaRPr lang="en-US"/>
           </a:p>
         </p:txBody>
       </p:sp>
@@ -1883,7 +1882,7 @@
           <a:p>
             <a:fld id="{5BCAD085-E8A6-8845-BD4E-CB4CCA059FC4}" type="datetimeFigureOut">
               <a:rPr lang="en-US" smtClean="0"/>
-              <a:t>5/8/26</a:t>
+              <a:t>1/27/13</a:t>
             </a:fld>
             <a:endParaRPr lang="en-US"/>
           </a:p>
@@ -1978,7 +1977,7 @@
           <a:p>
             <a:fld id="{5BCAD085-E8A6-8845-BD4E-CB4CCA059FC4}" type="datetimeFigureOut">
               <a:rPr lang="en-US" smtClean="0"/>
-              <a:t>5/8/26</a:t>
+              <a:t>1/27/13</a:t>
             </a:fld>
             <a:endParaRPr lang="en-US"/>
           </a:p>
@@ -2081,9 +2080,10 @@
           </a:lstStyle>
           <a:p>
             <a:r>
-              <a:rPr lang="en-US"/>
+              <a:rPr lang="en-US" smtClean="0"/>
               <a:t>Click to edit Master title style</a:t>
             </a:r>
+            <a:endParaRPr lang="en-US"/>
           </a:p>
         </p:txBody>
       </p:sp>
@@ -2137,37 +2137,38 @@
           <a:p>
             <a:pPr lvl="0"/>
             <a:r>
-              <a:rPr lang="en-US"/>
+              <a:rPr lang="en-US" smtClean="0"/>
               <a:t>Click to edit Master text styles</a:t>
             </a:r>
           </a:p>
           <a:p>
             <a:pPr lvl="1"/>
             <a:r>
-              <a:rPr lang="en-US"/>
+              <a:rPr lang="en-US" smtClean="0"/>
               <a:t>Second level</a:t>
             </a:r>
           </a:p>
           <a:p>
             <a:pPr lvl="2"/>
             <a:r>
-              <a:rPr lang="en-US"/>
+              <a:rPr lang="en-US" smtClean="0"/>
               <a:t>Third level</a:t>
             </a:r>
           </a:p>
           <a:p>
             <a:pPr lvl="3"/>
             <a:r>
-              <a:rPr lang="en-US"/>
+              <a:rPr lang="en-US" smtClean="0"/>
               <a:t>Fourth level</a:t>
             </a:r>
           </a:p>
           <a:p>
             <a:pPr lvl="4"/>
             <a:r>
-              <a:rPr lang="en-US"/>
+              <a:rPr lang="en-US" smtClean="0"/>
               <a:t>Fifth level</a:t>
             </a:r>
+            <a:endParaRPr lang="en-US"/>
           </a:p>
         </p:txBody>
       </p:sp>
@@ -2230,7 +2231,7 @@
           <a:p>
             <a:pPr lvl="0"/>
             <a:r>
-              <a:rPr lang="en-US"/>
+              <a:rPr lang="en-US" smtClean="0"/>
               <a:t>Click to edit Master text styles</a:t>
             </a:r>
           </a:p>
@@ -2253,7 +2254,7 @@
           <a:p>
             <a:fld id="{5BCAD085-E8A6-8845-BD4E-CB4CCA059FC4}" type="datetimeFigureOut">
               <a:rPr lang="en-US" smtClean="0"/>
-              <a:t>5/8/26</a:t>
+              <a:t>1/27/13</a:t>
             </a:fld>
             <a:endParaRPr lang="en-US"/>
           </a:p>
@@ -2356,9 +2357,10 @@
           </a:lstStyle>
           <a:p>
             <a:r>
-              <a:rPr lang="en-US"/>
+              <a:rPr lang="en-US" smtClean="0"/>
               <a:t>Click to edit Master title style</a:t>
             </a:r>
+            <a:endParaRPr lang="en-US"/>
           </a:p>
         </p:txBody>
       </p:sp>
@@ -2482,7 +2484,7 @@
           <a:p>
             <a:pPr lvl="0"/>
             <a:r>
-              <a:rPr lang="en-US"/>
+              <a:rPr lang="en-US" smtClean="0"/>
               <a:t>Click to edit Master text styles</a:t>
             </a:r>
           </a:p>
@@ -2505,7 +2507,7 @@
           <a:p>
             <a:fld id="{5BCAD085-E8A6-8845-BD4E-CB4CCA059FC4}" type="datetimeFigureOut">
               <a:rPr lang="en-US" smtClean="0"/>
-              <a:t>5/8/26</a:t>
+              <a:t>1/27/13</a:t>
             </a:fld>
             <a:endParaRPr lang="en-US"/>
           </a:p>
@@ -2614,9 +2616,10 @@
           <a:lstStyle/>
           <a:p>
             <a:r>
-              <a:rPr lang="en-US"/>
+              <a:rPr lang="en-US" smtClean="0"/>
               <a:t>Click to edit Master title style</a:t>
             </a:r>
+            <a:endParaRPr lang="en-US"/>
           </a:p>
         </p:txBody>
       </p:sp>
@@ -2647,37 +2650,38 @@
           <a:p>
             <a:pPr lvl="0"/>
             <a:r>
-              <a:rPr lang="en-US"/>
+              <a:rPr lang="en-US" smtClean="0"/>
               <a:t>Click to edit Master text styles</a:t>
             </a:r>
           </a:p>
           <a:p>
             <a:pPr lvl="1"/>
             <a:r>
-              <a:rPr lang="en-US"/>
+              <a:rPr lang="en-US" smtClean="0"/>
               <a:t>Second level</a:t>
             </a:r>
           </a:p>
           <a:p>
             <a:pPr lvl="2"/>
             <a:r>
-              <a:rPr lang="en-US"/>
+              <a:rPr lang="en-US" smtClean="0"/>
               <a:t>Third level</a:t>
             </a:r>
           </a:p>
           <a:p>
             <a:pPr lvl="3"/>
             <a:r>
-              <a:rPr lang="en-US"/>
+              <a:rPr lang="en-US" smtClean="0"/>
               <a:t>Fourth level</a:t>
             </a:r>
           </a:p>
           <a:p>
             <a:pPr lvl="4"/>
             <a:r>
-              <a:rPr lang="en-US"/>
+              <a:rPr lang="en-US" smtClean="0"/>
               <a:t>Fifth level</a:t>
             </a:r>
+            <a:endParaRPr lang="en-US"/>
           </a:p>
         </p:txBody>
       </p:sp>
@@ -2716,7 +2720,7 @@
           <a:p>
             <a:fld id="{5BCAD085-E8A6-8845-BD4E-CB4CCA059FC4}" type="datetimeFigureOut">
               <a:rPr lang="en-US" smtClean="0"/>
-              <a:t>5/8/26</a:t>
+              <a:t>1/27/13</a:t>
             </a:fld>
             <a:endParaRPr lang="en-US"/>
           </a:p>
@@ -3075,7 +3079,7 @@
 </file>
 
 <file path=ppt/slides/slide1.xml><?xml version="1.0" encoding="utf-8"?>
-<p:sld xmlns:a="http://schemas.openxmlformats.org/drawingml/2006/main" xmlns:r="http://schemas.openxmlformats.org/officeDocument/2006/relationships" xmlns:p="http://schemas.openxmlformats.org/presentationml/2006/main">
+<p:sld xmlns:a="http://schemas.openxmlformats.org/drawingml/2006/main" xmlns:p="http://schemas.openxmlformats.org/presentationml/2006/main" xmlns:r="http://schemas.openxmlformats.org/officeDocument/2006/relationships">
   <p:cSld>
     <p:spTree>
       <p:nvGrpSpPr>
@@ -3083,14 +3087,7 @@
         <p:cNvGrpSpPr/>
         <p:nvPr/>
       </p:nvGrpSpPr>
-      <p:grpSpPr>
-        <a:xfrm>
-          <a:off x="0" y="0"/>
-          <a:ext cx="0" cy="0"/>
-          <a:chOff x="0" y="0"/>
-          <a:chExt cx="0" cy="0"/>
-        </a:xfrm>
-      </p:grpSpPr>
+      <p:grpSpPr/>
       <p:sp>
         <p:nvSpPr>
           <p:cNvPr id="2" name="Rounded Rectangle 1"/>
@@ -3106,11 +3103,11 @@
             <a:avLst/>
           </a:prstGeom>
           <a:solidFill>
-            <a:srgbClr val="E8F4F8"/>
+            <a:srgbClr val="FFFFFF"/>
           </a:solidFill>
-          <a:ln w="15875">
+          <a:ln w="12700">
             <a:solidFill>
-              <a:srgbClr val="1F6F97"/>
+              <a:srgbClr val="1A1A1A"/>
             </a:solidFill>
           </a:ln>
         </p:spPr>
@@ -3129,16 +3126,16 @@
           </a:fontRef>
         </p:style>
         <p:txBody>
-          <a:bodyPr wrap="square" rtlCol="0" anchor="ctr"/>
+          <a:bodyPr rtlCol="0" anchor="ctr" wrap="square" tIns="54864" bIns="54864"/>
           <a:lstStyle/>
           <a:p>
             <a:pPr algn="ctr"/>
             <a:r>
               <a:rPr sz="1500" b="1">
                 <a:solidFill>
-                  <a:srgbClr val="222222"/>
-                </a:solidFill>
-                <a:latin typeface="Calibri"/>
+                  <a:srgbClr val="000000"/>
+                </a:solidFill>
+                <a:latin typeface="Arial"/>
               </a:rPr>
               <a:t>Source population</a:t>
             </a:r>
@@ -3148,9 +3145,9 @@
             <a:r>
               <a:rPr sz="1400" b="0">
                 <a:solidFill>
-                  <a:srgbClr val="222222"/>
-                </a:solidFill>
-                <a:latin typeface="Calibri"/>
+                  <a:srgbClr val="000000"/>
+                </a:solidFill>
+                <a:latin typeface="Arial"/>
               </a:rPr>
               <a:t>N = 32,969</a:t>
             </a:r>
@@ -3171,9 +3168,9 @@
           <a:prstGeom prst="line">
             <a:avLst/>
           </a:prstGeom>
-          <a:ln w="16510">
+          <a:ln w="12700">
             <a:solidFill>
-              <a:srgbClr val="444444"/>
+              <a:srgbClr val="1A1A1A"/>
             </a:solidFill>
             <a:tailEnd type="triangle" w="med" len="med"/>
           </a:ln>
@@ -3201,18 +3198,18 @@
         </p:nvSpPr>
         <p:spPr>
           <a:xfrm>
-            <a:off x="2743200" y="868680"/>
-            <a:ext cx="5120640" cy="640080"/>
+            <a:off x="2651760" y="868680"/>
+            <a:ext cx="5303520" cy="640080"/>
           </a:xfrm>
           <a:prstGeom prst="roundRect">
             <a:avLst/>
           </a:prstGeom>
           <a:solidFill>
-            <a:srgbClr val="FFF3CD"/>
+            <a:srgbClr val="FFFFFF"/>
           </a:solidFill>
-          <a:ln w="15875">
+          <a:ln w="12700">
             <a:solidFill>
-              <a:srgbClr val="856404"/>
+              <a:srgbClr val="1A1A1A"/>
             </a:solidFill>
           </a:ln>
         </p:spPr>
@@ -3231,18 +3228,18 @@
           </a:fontRef>
         </p:style>
         <p:txBody>
-          <a:bodyPr wrap="square" rtlCol="0" anchor="ctr"/>
+          <a:bodyPr rtlCol="0" anchor="ctr" wrap="square" tIns="54864" bIns="54864"/>
           <a:lstStyle/>
           <a:p>
             <a:pPr algn="ctr"/>
             <a:r>
               <a:rPr sz="1400" b="0">
                 <a:solidFill>
-                  <a:srgbClr val="222222"/>
-                </a:solidFill>
-                <a:latin typeface="Calibri"/>
+                  <a:srgbClr val="000000"/>
+                </a:solidFill>
+                <a:latin typeface="Arial"/>
               </a:rPr>
-              <a:t>HPV vaccine ascertained</a:t>
+              <a:t>HPV vaccine prescription ascertained</a:t>
             </a:r>
           </a:p>
           <a:p>
@@ -3250,11 +3247,11 @@
             <a:r>
               <a:rPr sz="1300" b="0">
                 <a:solidFill>
-                  <a:srgbClr val="222222"/>
-                </a:solidFill>
-                <a:latin typeface="Calibri"/>
+                  <a:srgbClr val="000000"/>
+                </a:solidFill>
+                <a:latin typeface="Arial"/>
               </a:rPr>
-              <a:t>Vaccinated 2,156  /  Unvaccinated 30,813</a:t>
+              <a:t>Vaccinated 2,156        Unvaccinated 30,813</a:t>
             </a:r>
           </a:p>
         </p:txBody>
@@ -3273,9 +3270,9 @@
           <a:prstGeom prst="line">
             <a:avLst/>
           </a:prstGeom>
-          <a:ln w="16510">
+          <a:ln w="12700">
             <a:solidFill>
-              <a:srgbClr val="444444"/>
+              <a:srgbClr val="1A1A1A"/>
             </a:solidFill>
             <a:tailEnd type="triangle" w="med" len="med"/>
           </a:ln>
@@ -3309,9 +3306,9 @@
           <a:prstGeom prst="line">
             <a:avLst/>
           </a:prstGeom>
-          <a:ln w="16510">
+          <a:ln w="12700">
             <a:solidFill>
-              <a:srgbClr val="444444"/>
+              <a:srgbClr val="1A1A1A"/>
             </a:solidFill>
             <a:tailEnd type="triangle" w="med" len="med"/>
           </a:ln>
@@ -3346,11 +3343,11 @@
             <a:avLst/>
           </a:prstGeom>
           <a:solidFill>
-            <a:srgbClr val="D4EDDA"/>
+            <a:srgbClr val="F2F2F2"/>
           </a:solidFill>
-          <a:ln w="15875">
+          <a:ln w="12700">
             <a:solidFill>
-              <a:srgbClr val="155724"/>
+              <a:srgbClr val="1A1A1A"/>
             </a:solidFill>
           </a:ln>
         </p:spPr>
@@ -3369,36 +3366,18 @@
           </a:fontRef>
         </p:style>
         <p:txBody>
-          <a:bodyPr wrap="square" rtlCol="0" anchor="ctr"/>
+          <a:bodyPr rtlCol="0" anchor="ctr" wrap="square" tIns="54864" bIns="54864"/>
           <a:lstStyle/>
           <a:p>
             <a:pPr algn="ctr"/>
             <a:r>
-              <a:rPr sz="1600" b="1">
-                <a:solidFill>
-                  <a:srgbClr val="222222"/>
-                </a:solidFill>
-                <a:latin typeface="Calibri"/>
+              <a:rPr sz="1500" b="1">
+                <a:solidFill>
+                  <a:srgbClr val="000000"/>
+                </a:solidFill>
+                <a:latin typeface="Arial"/>
               </a:rPr>
-              <a:t>COHORT A — </a:t>
-            </a:r>
-            <a:r>
-              <a:rPr lang="en-US" sz="1600" b="1">
-                <a:solidFill>
-                  <a:srgbClr val="222222"/>
-                </a:solidFill>
-                <a:latin typeface="Calibri"/>
-              </a:rPr>
-              <a:t>Long-term </a:t>
-            </a:r>
-            <a:r>
-              <a:rPr sz="1600" b="1">
-                <a:solidFill>
-                  <a:srgbClr val="222222"/>
-                </a:solidFill>
-                <a:latin typeface="Calibri"/>
-              </a:rPr>
-              <a:t>Safety</a:t>
+              <a:t>Cohort A — chronic-disease safety</a:t>
             </a:r>
           </a:p>
         </p:txBody>
@@ -3418,11 +3397,11 @@
             <a:avLst/>
           </a:prstGeom>
           <a:solidFill>
-            <a:srgbClr val="FDE2E4"/>
+            <a:srgbClr val="F2F2F2"/>
           </a:solidFill>
-          <a:ln w="15875">
+          <a:ln w="12700">
             <a:solidFill>
-              <a:srgbClr val="9B2226"/>
+              <a:srgbClr val="1A1A1A"/>
             </a:solidFill>
           </a:ln>
         </p:spPr>
@@ -3441,36 +3420,18 @@
           </a:fontRef>
         </p:style>
         <p:txBody>
-          <a:bodyPr wrap="square" rtlCol="0" anchor="ctr"/>
+          <a:bodyPr rtlCol="0" anchor="ctr" wrap="square" tIns="54864" bIns="54864"/>
           <a:lstStyle/>
           <a:p>
             <a:pPr algn="ctr"/>
             <a:r>
-              <a:rPr sz="1600" b="1">
-                <a:solidFill>
-                  <a:srgbClr val="222222"/>
-                </a:solidFill>
-                <a:latin typeface="Calibri"/>
+              <a:rPr sz="1500" b="1">
+                <a:solidFill>
+                  <a:srgbClr val="000000"/>
+                </a:solidFill>
+                <a:latin typeface="Arial"/>
               </a:rPr>
-              <a:t>COHORT B — </a:t>
-            </a:r>
-            <a:r>
-              <a:rPr lang="en-US" sz="1600" b="1">
-                <a:solidFill>
-                  <a:srgbClr val="222222"/>
-                </a:solidFill>
-                <a:latin typeface="Calibri"/>
-              </a:rPr>
-              <a:t>Post-surgical </a:t>
-            </a:r>
-            <a:r>
-              <a:rPr sz="1600" b="1">
-                <a:solidFill>
-                  <a:srgbClr val="222222"/>
-                </a:solidFill>
-                <a:latin typeface="Calibri"/>
-              </a:rPr>
-              <a:t>Efficacy</a:t>
+              <a:t>Cohort B — post-surgical efficacy</a:t>
             </a:r>
           </a:p>
         </p:txBody>
@@ -3489,9 +3450,9 @@
           <a:prstGeom prst="line">
             <a:avLst/>
           </a:prstGeom>
-          <a:ln w="16510">
+          <a:ln w="12700">
             <a:solidFill>
-              <a:srgbClr val="444444"/>
+              <a:srgbClr val="1A1A1A"/>
             </a:solidFill>
             <a:tailEnd type="triangle" w="med" len="med"/>
           </a:ln>
@@ -3526,11 +3487,11 @@
             <a:avLst/>
           </a:prstGeom>
           <a:solidFill>
-            <a:srgbClr val="EAF6EE"/>
+            <a:srgbClr val="FFFFFF"/>
           </a:solidFill>
-          <a:ln w="15875">
+          <a:ln w="12700">
             <a:solidFill>
-              <a:srgbClr val="155724"/>
+              <a:srgbClr val="1A1A1A"/>
             </a:solidFill>
           </a:ln>
         </p:spPr>
@@ -3549,30 +3510,30 @@
           </a:fontRef>
         </p:style>
         <p:txBody>
-          <a:bodyPr wrap="square" rtlCol="0" anchor="ctr"/>
+          <a:bodyPr rtlCol="0" anchor="ctr" wrap="square" tIns="54864" bIns="54864"/>
           <a:lstStyle/>
           <a:p>
             <a:pPr algn="ctr"/>
             <a:r>
-              <a:rPr sz="1400" b="0">
-                <a:solidFill>
-                  <a:srgbClr val="222222"/>
-                </a:solidFill>
-                <a:latin typeface="Calibri"/>
+              <a:rPr sz="1300" b="0">
+                <a:solidFill>
+                  <a:srgbClr val="000000"/>
+                </a:solidFill>
+                <a:latin typeface="Arial"/>
               </a:rPr>
-              <a:t>Eligibility check</a:t>
+              <a:t>Eligibility (index date ≤ 31 Dec 2024)</a:t>
             </a:r>
           </a:p>
           <a:p>
             <a:pPr algn="ctr"/>
             <a:r>
-              <a:rPr sz="1400" b="0">
-                <a:solidFill>
-                  <a:srgbClr val="222222"/>
-                </a:solidFill>
-                <a:latin typeface="Calibri"/>
+              <a:rPr sz="1200" b="0">
+                <a:solidFill>
+                  <a:srgbClr val="000000"/>
+                </a:solidFill>
+                <a:latin typeface="Arial"/>
               </a:rPr>
-              <a:t>+ pseudo index date</a:t>
+              <a:t>Pseudo-index assigned to unvaccinated controls</a:t>
             </a:r>
           </a:p>
         </p:txBody>
@@ -3586,14 +3547,14 @@
         <p:spPr>
           <a:xfrm>
             <a:off x="2743200" y="3154680"/>
-            <a:ext cx="0" cy="205740"/>
+            <a:ext cx="0" cy="251460"/>
           </a:xfrm>
           <a:prstGeom prst="line">
             <a:avLst/>
           </a:prstGeom>
-          <a:ln w="16510">
+          <a:ln w="12700">
             <a:solidFill>
-              <a:srgbClr val="444444"/>
+              <a:srgbClr val="1A1A1A"/>
             </a:solidFill>
             <a:tailEnd type="triangle" w="med" len="med"/>
           </a:ln>
@@ -3621,18 +3582,18 @@
         </p:nvSpPr>
         <p:spPr>
           <a:xfrm>
-            <a:off x="594359" y="3360420"/>
-            <a:ext cx="4297680" cy="777240"/>
+            <a:off x="594359" y="3406140"/>
+            <a:ext cx="4297680" cy="868680"/>
           </a:xfrm>
           <a:prstGeom prst="roundRect">
             <a:avLst/>
           </a:prstGeom>
           <a:solidFill>
-            <a:srgbClr val="EAF6EE"/>
+            <a:srgbClr val="FFFFFF"/>
           </a:solidFill>
-          <a:ln w="15875">
+          <a:ln w="12700">
             <a:solidFill>
-              <a:srgbClr val="155724"/>
+              <a:srgbClr val="1A1A1A"/>
             </a:solidFill>
           </a:ln>
         </p:spPr>
@@ -3651,30 +3612,54 @@
           </a:fontRef>
         </p:style>
         <p:txBody>
-          <a:bodyPr wrap="square" rtlCol="0" anchor="ctr"/>
+          <a:bodyPr rtlCol="0" anchor="ctr" wrap="square" tIns="54864" bIns="54864"/>
           <a:lstStyle/>
           <a:p>
             <a:pPr algn="ctr"/>
             <a:r>
-              <a:rPr sz="1400" b="0">
-                <a:solidFill>
-                  <a:srgbClr val="222222"/>
-                </a:solidFill>
-                <a:latin typeface="Calibri"/>
+              <a:rPr sz="1300" b="0">
+                <a:solidFill>
+                  <a:srgbClr val="000000"/>
+                </a:solidFill>
+                <a:latin typeface="Arial"/>
               </a:rPr>
-              <a:t>Propensity-score model</a:t>
+              <a:t>1:1 propensity-score matching</a:t>
             </a:r>
           </a:p>
           <a:p>
             <a:pPr algn="ctr"/>
             <a:r>
-              <a:rPr sz="1400" b="0">
-                <a:solidFill>
-                  <a:srgbClr val="222222"/>
-                </a:solidFill>
-                <a:latin typeface="Calibri"/>
+              <a:rPr sz="1200" b="0">
+                <a:solidFill>
+                  <a:srgbClr val="000000"/>
+                </a:solidFill>
+                <a:latin typeface="Arial"/>
               </a:rPr>
-              <a:t>+ 1:1 matching</a:t>
+              <a:t>(caliper 0.2 × SD of logit PS)</a:t>
+            </a:r>
+          </a:p>
+          <a:p>
+            <a:pPr algn="ctr"/>
+            <a:r>
+              <a:rPr sz="1200" b="0">
+                <a:solidFill>
+                  <a:srgbClr val="000000"/>
+                </a:solidFill>
+                <a:latin typeface="Arial"/>
+              </a:rPr>
+              <a:t>+ ≥2 doses + 3-month landmark</a:t>
+            </a:r>
+          </a:p>
+          <a:p>
+            <a:pPr algn="ctr"/>
+            <a:r>
+              <a:rPr sz="1200" b="0">
+                <a:solidFill>
+                  <a:srgbClr val="000000"/>
+                </a:solidFill>
+                <a:latin typeface="Arial"/>
+              </a:rPr>
+              <a:t>(matched-pair integrity preserved)</a:t>
             </a:r>
           </a:p>
         </p:txBody>
@@ -3687,15 +3672,15 @@
         </p:nvCxnSpPr>
         <p:spPr>
           <a:xfrm>
-            <a:off x="2743200" y="4137659"/>
-            <a:ext cx="0" cy="297181"/>
+            <a:off x="2743200" y="4274820"/>
+            <a:ext cx="0" cy="274320"/>
           </a:xfrm>
           <a:prstGeom prst="line">
             <a:avLst/>
           </a:prstGeom>
-          <a:ln w="16510">
+          <a:ln w="12700">
             <a:solidFill>
-              <a:srgbClr val="444444"/>
+              <a:srgbClr val="1A1A1A"/>
             </a:solidFill>
             <a:tailEnd type="triangle" w="med" len="med"/>
           </a:ln>
@@ -3723,18 +3708,18 @@
         </p:nvSpPr>
         <p:spPr>
           <a:xfrm>
-            <a:off x="594359" y="4434840"/>
-            <a:ext cx="4297680" cy="1463040"/>
+            <a:off x="594359" y="4549140"/>
+            <a:ext cx="4297680" cy="1508760"/>
           </a:xfrm>
           <a:prstGeom prst="roundRect">
             <a:avLst/>
           </a:prstGeom>
           <a:solidFill>
-            <a:srgbClr val="A8D5B5"/>
+            <a:srgbClr val="E6E6E6"/>
           </a:solidFill>
-          <a:ln w="15875">
+          <a:ln w="12700">
             <a:solidFill>
-              <a:srgbClr val="155724"/>
+              <a:srgbClr val="1A1A1A"/>
             </a:solidFill>
           </a:ln>
         </p:spPr>
@@ -3753,63 +3738,78 @@
           </a:fontRef>
         </p:style>
         <p:txBody>
-          <a:bodyPr wrap="square" rtlCol="0" anchor="ctr"/>
+          <a:bodyPr rtlCol="0" anchor="ctr" wrap="square" tIns="54864" bIns="54864"/>
           <a:lstStyle/>
           <a:p>
             <a:pPr algn="ctr"/>
             <a:r>
-              <a:rPr sz="1500" b="1">
-                <a:solidFill>
-                  <a:srgbClr val="222222"/>
-                </a:solidFill>
-                <a:latin typeface="Calibri"/>
+              <a:rPr sz="1400" b="1">
+                <a:solidFill>
+                  <a:srgbClr val="000000"/>
+                </a:solidFill>
+                <a:latin typeface="Arial"/>
               </a:rPr>
-              <a:t>Final Cohort A   n = 4,102</a:t>
+              <a:t>Final analytic Cohort A   n = 2,776</a:t>
             </a:r>
           </a:p>
           <a:p>
             <a:pPr algn="ctr"/>
             <a:r>
-              <a:rPr sz="1300" b="0">
-                <a:solidFill>
-                  <a:srgbClr val="222222"/>
-                </a:solidFill>
-                <a:latin typeface="Calibri"/>
+              <a:rPr sz="1200" b="0">
+                <a:solidFill>
+                  <a:srgbClr val="000000"/>
+                </a:solidFill>
+                <a:latin typeface="Arial"/>
               </a:rPr>
-              <a:t>Vaccinated 2,051</a:t>
+              <a:t/>
             </a:r>
           </a:p>
           <a:p>
             <a:pPr algn="ctr"/>
             <a:r>
-              <a:rPr sz="1300" b="0">
-                <a:solidFill>
-                  <a:srgbClr val="222222"/>
-                </a:solidFill>
-                <a:latin typeface="Calibri"/>
+              <a:rPr sz="1200" b="0">
+                <a:solidFill>
+                  <a:srgbClr val="000000"/>
+                </a:solidFill>
+                <a:latin typeface="Arial"/>
               </a:rPr>
-              <a:t>Unvaccinated 2,051</a:t>
+              <a:t>Vaccinated 1,396</a:t>
             </a:r>
           </a:p>
           <a:p>
             <a:pPr algn="ctr"/>
-            <a:endParaRPr sz="1300" b="0">
-              <a:solidFill>
-                <a:srgbClr val="222222"/>
-              </a:solidFill>
-              <a:latin typeface="Calibri"/>
-            </a:endParaRPr>
+            <a:r>
+              <a:rPr sz="1200" b="0">
+                <a:solidFill>
+                  <a:srgbClr val="000000"/>
+                </a:solidFill>
+                <a:latin typeface="Arial"/>
+              </a:rPr>
+              <a:t>Unvaccinated 1,380</a:t>
+            </a:r>
           </a:p>
           <a:p>
             <a:pPr algn="ctr"/>
             <a:r>
-              <a:rPr sz="1300" b="0">
-                <a:solidFill>
-                  <a:srgbClr val="222222"/>
-                </a:solidFill>
-                <a:latin typeface="Calibri"/>
+              <a:rPr sz="1200" b="0">
+                <a:solidFill>
+                  <a:srgbClr val="000000"/>
+                </a:solidFill>
+                <a:latin typeface="Arial"/>
               </a:rPr>
-              <a:t>Outcomes: 5 chronic conditions</a:t>
+              <a:t/>
+            </a:r>
+          </a:p>
+          <a:p>
+            <a:pPr algn="ctr"/>
+            <a:r>
+              <a:rPr sz="1200" b="0">
+                <a:solidFill>
+                  <a:srgbClr val="000000"/>
+                </a:solidFill>
+                <a:latin typeface="Arial"/>
+              </a:rPr>
+              <a:t>Outcomes: 5 chronic conditions + composites</a:t>
             </a:r>
           </a:p>
         </p:txBody>
@@ -3828,9 +3828,9 @@
           <a:prstGeom prst="line">
             <a:avLst/>
           </a:prstGeom>
-          <a:ln w="16510">
+          <a:ln w="12700">
             <a:solidFill>
-              <a:srgbClr val="444444"/>
+              <a:srgbClr val="1A1A1A"/>
             </a:solidFill>
             <a:tailEnd type="triangle" w="med" len="med"/>
           </a:ln>
@@ -3865,11 +3865,11 @@
             <a:avLst/>
           </a:prstGeom>
           <a:solidFill>
-            <a:srgbClr val="FDEDEE"/>
+            <a:srgbClr val="FFFFFF"/>
           </a:solidFill>
-          <a:ln w="15875">
+          <a:ln w="12700">
             <a:solidFill>
-              <a:srgbClr val="9B2226"/>
+              <a:srgbClr val="1A1A1A"/>
             </a:solidFill>
           </a:ln>
         </p:spPr>
@@ -3888,30 +3888,30 @@
           </a:fontRef>
         </p:style>
         <p:txBody>
-          <a:bodyPr wrap="square" rtlCol="0" anchor="ctr"/>
+          <a:bodyPr rtlCol="0" anchor="ctr" wrap="square" tIns="54864" bIns="54864"/>
           <a:lstStyle/>
           <a:p>
             <a:pPr algn="ctr"/>
             <a:r>
-              <a:rPr sz="1400" b="0">
-                <a:solidFill>
-                  <a:srgbClr val="222222"/>
-                </a:solidFill>
-                <a:latin typeface="Calibri"/>
+              <a:rPr sz="1300" b="0">
+                <a:solidFill>
+                  <a:srgbClr val="000000"/>
+                </a:solidFill>
+                <a:latin typeface="Arial"/>
               </a:rPr>
-              <a:t>Cervical surgery</a:t>
+              <a:t>Cervical surgery (conization or hysterectomy)</a:t>
             </a:r>
           </a:p>
           <a:p>
             <a:pPr algn="ctr"/>
             <a:r>
-              <a:rPr sz="1400" b="0">
-                <a:solidFill>
-                  <a:srgbClr val="222222"/>
-                </a:solidFill>
-                <a:latin typeface="Calibri"/>
+              <a:rPr sz="1200" b="0">
+                <a:solidFill>
+                  <a:srgbClr val="000000"/>
+                </a:solidFill>
+                <a:latin typeface="Arial"/>
               </a:rPr>
-              <a:t>n = 6,890</a:t>
+              <a:t>n = 6,890       Eligibility index date ≤ 31 Dec 2024</a:t>
             </a:r>
           </a:p>
         </p:txBody>
@@ -3925,14 +3925,14 @@
         <p:spPr>
           <a:xfrm>
             <a:off x="7863840" y="3154680"/>
-            <a:ext cx="0" cy="205740"/>
+            <a:ext cx="0" cy="251460"/>
           </a:xfrm>
           <a:prstGeom prst="line">
             <a:avLst/>
           </a:prstGeom>
-          <a:ln w="16510">
+          <a:ln w="12700">
             <a:solidFill>
-              <a:srgbClr val="444444"/>
+              <a:srgbClr val="1A1A1A"/>
             </a:solidFill>
             <a:tailEnd type="triangle" w="med" len="med"/>
           </a:ln>
@@ -3960,18 +3960,18 @@
         </p:nvSpPr>
         <p:spPr>
           <a:xfrm>
-            <a:off x="5715000" y="3360420"/>
-            <a:ext cx="4297680" cy="777240"/>
+            <a:off x="5715000" y="3406140"/>
+            <a:ext cx="4297680" cy="868680"/>
           </a:xfrm>
           <a:prstGeom prst="roundRect">
             <a:avLst/>
           </a:prstGeom>
           <a:solidFill>
-            <a:srgbClr val="FDEDEE"/>
+            <a:srgbClr val="FFFFFF"/>
           </a:solidFill>
-          <a:ln w="15875">
+          <a:ln w="12700">
             <a:solidFill>
-              <a:srgbClr val="9B2226"/>
+              <a:srgbClr val="1A1A1A"/>
             </a:solidFill>
           </a:ln>
         </p:spPr>
@@ -3990,30 +3990,54 @@
           </a:fontRef>
         </p:style>
         <p:txBody>
-          <a:bodyPr wrap="square" rtlCol="0" anchor="ctr"/>
+          <a:bodyPr rtlCol="0" anchor="ctr" wrap="square" tIns="54864" bIns="54864"/>
           <a:lstStyle/>
           <a:p>
             <a:pPr algn="ctr"/>
             <a:r>
-              <a:rPr sz="1400" b="0">
-                <a:solidFill>
-                  <a:srgbClr val="222222"/>
-                </a:solidFill>
-                <a:latin typeface="Calibri"/>
+              <a:rPr sz="1300" b="0">
+                <a:solidFill>
+                  <a:srgbClr val="000000"/>
+                </a:solidFill>
+                <a:latin typeface="Arial"/>
               </a:rPr>
-              <a:t>1:up-to-5 initial match</a:t>
+              <a:t>Variable-ratio matching</a:t>
             </a:r>
           </a:p>
           <a:p>
             <a:pPr algn="ctr"/>
             <a:r>
-              <a:rPr sz="1400" b="0">
-                <a:solidFill>
-                  <a:srgbClr val="222222"/>
-                </a:solidFill>
-                <a:latin typeface="Calibri"/>
+              <a:rPr sz="1200" b="0">
+                <a:solidFill>
+                  <a:srgbClr val="000000"/>
+                </a:solidFill>
+                <a:latin typeface="Arial"/>
               </a:rPr>
-              <a:t>Vac 411  /  Non-vac 1,815</a:t>
+              <a:t>(1:up-to-5 then 1:up-to-4 fine matching)</a:t>
+            </a:r>
+          </a:p>
+          <a:p>
+            <a:pPr algn="ctr"/>
+            <a:r>
+              <a:rPr sz="1200" b="0">
+                <a:solidFill>
+                  <a:srgbClr val="000000"/>
+                </a:solidFill>
+                <a:latin typeface="Arial"/>
+              </a:rPr>
+              <a:t>+ ≥2 doses + 3-month landmark</a:t>
+            </a:r>
+          </a:p>
+          <a:p>
+            <a:pPr algn="ctr"/>
+            <a:r>
+              <a:rPr sz="1200" b="0">
+                <a:solidFill>
+                  <a:srgbClr val="000000"/>
+                </a:solidFill>
+                <a:latin typeface="Arial"/>
+              </a:rPr>
+              <a:t>(matched-set integrity preserved)</a:t>
             </a:r>
           </a:p>
         </p:txBody>
@@ -4026,15 +4050,15 @@
         </p:nvCxnSpPr>
         <p:spPr>
           <a:xfrm>
-            <a:off x="7863840" y="4137659"/>
-            <a:ext cx="0" cy="297181"/>
+            <a:off x="7863840" y="4274820"/>
+            <a:ext cx="0" cy="274320"/>
           </a:xfrm>
           <a:prstGeom prst="line">
             <a:avLst/>
           </a:prstGeom>
-          <a:ln w="16510">
+          <a:ln w="12700">
             <a:solidFill>
-              <a:srgbClr val="444444"/>
+              <a:srgbClr val="1A1A1A"/>
             </a:solidFill>
             <a:tailEnd type="triangle" w="med" len="med"/>
           </a:ln>
@@ -4062,18 +4086,18 @@
         </p:nvSpPr>
         <p:spPr>
           <a:xfrm>
-            <a:off x="5715000" y="4434840"/>
-            <a:ext cx="4297680" cy="1463040"/>
+            <a:off x="5715000" y="4549140"/>
+            <a:ext cx="4297680" cy="1508760"/>
           </a:xfrm>
           <a:prstGeom prst="roundRect">
             <a:avLst/>
           </a:prstGeom>
           <a:solidFill>
-            <a:srgbClr val="F4A4A8"/>
+            <a:srgbClr val="E6E6E6"/>
           </a:solidFill>
-          <a:ln w="15875">
+          <a:ln w="12700">
             <a:solidFill>
-              <a:srgbClr val="9B2226"/>
+              <a:srgbClr val="1A1A1A"/>
             </a:solidFill>
           </a:ln>
         </p:spPr>
@@ -4092,129 +4116,83 @@
           </a:fontRef>
         </p:style>
         <p:txBody>
-          <a:bodyPr wrap="square" rtlCol="0" anchor="ctr"/>
+          <a:bodyPr rtlCol="0" anchor="ctr" wrap="square" tIns="54864" bIns="54864"/>
           <a:lstStyle/>
           <a:p>
             <a:pPr algn="ctr"/>
             <a:r>
-              <a:rPr sz="1500" b="1">
-                <a:solidFill>
-                  <a:srgbClr val="222222"/>
-                </a:solidFill>
-                <a:latin typeface="Calibri"/>
+              <a:rPr sz="1400" b="1">
+                <a:solidFill>
+                  <a:srgbClr val="000000"/>
+                </a:solidFill>
+                <a:latin typeface="Arial"/>
               </a:rPr>
-              <a:t>Final Cohort B   n = 1,108</a:t>
+              <a:t>Final analytic Cohort B   n = 912</a:t>
             </a:r>
           </a:p>
           <a:p>
             <a:pPr algn="ctr"/>
             <a:r>
-              <a:rPr sz="1300" b="0">
-                <a:solidFill>
-                  <a:srgbClr val="222222"/>
-                </a:solidFill>
-                <a:latin typeface="Calibri"/>
+              <a:rPr sz="1200" b="0">
+                <a:solidFill>
+                  <a:srgbClr val="000000"/>
+                </a:solidFill>
+                <a:latin typeface="Arial"/>
               </a:rPr>
-              <a:t>Vaccinated 241</a:t>
+              <a:t/>
             </a:r>
           </a:p>
           <a:p>
             <a:pPr algn="ctr"/>
             <a:r>
-              <a:rPr sz="1300" b="0">
-                <a:solidFill>
-                  <a:srgbClr val="222222"/>
-                </a:solidFill>
-                <a:latin typeface="Calibri"/>
+              <a:rPr sz="1200" b="0">
+                <a:solidFill>
+                  <a:srgbClr val="000000"/>
+                </a:solidFill>
+                <a:latin typeface="Arial"/>
               </a:rPr>
-              <a:t>Unvaccinated 867</a:t>
+              <a:t>Vaccinated 203</a:t>
             </a:r>
           </a:p>
           <a:p>
             <a:pPr algn="ctr"/>
-            <a:endParaRPr sz="1300" b="0">
-              <a:solidFill>
-                <a:srgbClr val="222222"/>
-              </a:solidFill>
-              <a:latin typeface="Calibri"/>
-            </a:endParaRPr>
+            <a:r>
+              <a:rPr sz="1200" b="0">
+                <a:solidFill>
+                  <a:srgbClr val="000000"/>
+                </a:solidFill>
+                <a:latin typeface="Arial"/>
+              </a:rPr>
+              <a:t>Unvaccinated 709</a:t>
+            </a:r>
           </a:p>
           <a:p>
             <a:pPr algn="ctr"/>
             <a:r>
-              <a:rPr sz="1300" b="0">
-                <a:solidFill>
-                  <a:srgbClr val="222222"/>
-                </a:solidFill>
-                <a:latin typeface="Calibri"/>
+              <a:rPr sz="1200" b="0">
+                <a:solidFill>
+                  <a:srgbClr val="000000"/>
+                </a:solidFill>
+                <a:latin typeface="Arial"/>
               </a:rPr>
-              <a:t>Outcomes: recurrence, HPV</a:t>
+              <a:t/>
+            </a:r>
+          </a:p>
+          <a:p>
+            <a:pPr algn="ctr"/>
+            <a:r>
+              <a:rPr sz="1200" b="0">
+                <a:solidFill>
+                  <a:srgbClr val="000000"/>
+                </a:solidFill>
+                <a:latin typeface="Arial"/>
+              </a:rPr>
+              <a:t>Outcomes: lesion recurrence; hr-HPV clearance</a:t>
             </a:r>
           </a:p>
         </p:txBody>
       </p:sp>
     </p:spTree>
-  </p:cSld>
-  <p:clrMapOvr>
-    <a:masterClrMapping/>
-  </p:clrMapOvr>
-</p:sld>
-</file>
-
-<file path=ppt/slides/slide2.xml><?xml version="1.0" encoding="utf-8"?>
-<p:sld xmlns:a="http://schemas.openxmlformats.org/drawingml/2006/main" xmlns:r="http://schemas.openxmlformats.org/officeDocument/2006/relationships" xmlns:p="http://schemas.openxmlformats.org/presentationml/2006/main">
-  <p:cSld>
-    <p:spTree>
-      <p:nvGrpSpPr>
-        <p:cNvPr id="1" name=""/>
-        <p:cNvGrpSpPr/>
-        <p:nvPr/>
-      </p:nvGrpSpPr>
-      <p:grpSpPr>
-        <a:xfrm>
-          <a:off x="0" y="0"/>
-          <a:ext cx="0" cy="0"/>
-          <a:chOff x="0" y="0"/>
-          <a:chExt cx="0" cy="0"/>
-        </a:xfrm>
-      </p:grpSpPr>
-      <p:pic>
-        <p:nvPicPr>
-          <p:cNvPr id="2" name="Figure1_CohortSelection.png" title="Figure1_CohortSelection.png">
-            <a:extLst>
-              <a:ext uri="{FF2B5EF4-FFF2-40B4-BE49-F238E27FC236}">
-                <a16:creationId xmlns:a16="http://schemas.microsoft.com/office/drawing/2014/main" id="{692250DA-55CC-0DD9-14D4-7C7614AEA35C}"/>
-              </a:ext>
-            </a:extLst>
-          </p:cNvPr>
-          <p:cNvPicPr>
-            <a:picLocks noChangeAspect="1"/>
-          </p:cNvPicPr>
-          <p:nvPr/>
-        </p:nvPicPr>
-        <p:blipFill>
-          <a:blip r:embed="rId2"/>
-          <a:srcRect/>
-          <a:stretch>
-            <a:fillRect/>
-          </a:stretch>
-        </p:blipFill>
-        <p:spPr bwMode="auto">
-          <a:xfrm>
-            <a:off x="3236912" y="1290637"/>
-            <a:ext cx="5715000" cy="4276725"/>
-          </a:xfrm>
-          <a:prstGeom prst="rect">
-            <a:avLst/>
-          </a:prstGeom>
-        </p:spPr>
-      </p:pic>
-    </p:spTree>
-    <p:extLst>
-      <p:ext uri="{BB962C8B-B14F-4D97-AF65-F5344CB8AC3E}">
-        <p14:creationId xmlns:p14="http://schemas.microsoft.com/office/powerpoint/2010/main" val="2072521256"/>
-      </p:ext>
-    </p:extLst>
   </p:cSld>
   <p:clrMapOvr>
     <a:masterClrMapping/>

--- a/Data/Figure1_CohortSelection.pptx
+++ b/Data/Figure1_CohortSelection.pptx
@@ -3096,8 +3096,8 @@
         </p:nvSpPr>
         <p:spPr>
           <a:xfrm>
-            <a:off x="3017520" y="182880"/>
-            <a:ext cx="4572000" cy="640080"/>
+            <a:off x="3474720" y="205740"/>
+            <a:ext cx="4206240" cy="594360"/>
           </a:xfrm>
           <a:prstGeom prst="roundRect">
             <a:avLst/>
@@ -3126,12 +3126,12 @@
           </a:fontRef>
         </p:style>
         <p:txBody>
-          <a:bodyPr rtlCol="0" anchor="ctr" wrap="square" tIns="54864" bIns="54864"/>
+          <a:bodyPr rtlCol="0" anchor="ctr" wrap="square"/>
           <a:lstStyle/>
           <a:p>
             <a:pPr algn="ctr"/>
             <a:r>
-              <a:rPr sz="1500" b="1">
+              <a:rPr sz="1400" b="1">
                 <a:solidFill>
                   <a:srgbClr val="000000"/>
                 </a:solidFill>
@@ -3143,7 +3143,7 @@
           <a:p>
             <a:pPr algn="ctr"/>
             <a:r>
-              <a:rPr sz="1400" b="0">
+              <a:rPr sz="1300" b="0">
                 <a:solidFill>
                   <a:srgbClr val="000000"/>
                 </a:solidFill>
@@ -3161,9 +3161,9 @@
           <p:nvPr/>
         </p:nvCxnSpPr>
         <p:spPr>
-          <a:xfrm>
-            <a:off x="5303520" y="822960"/>
-            <a:ext cx="0" cy="45720"/>
+          <a:xfrm flipH="1">
+            <a:off x="2926080" y="800100"/>
+            <a:ext cx="2651760" cy="274320"/>
           </a:xfrm>
           <a:prstGeom prst="line">
             <a:avLst/>
@@ -3190,16 +3190,196 @@
           </a:fontRef>
         </p:style>
       </p:cxnSp>
-      <p:sp>
-        <p:nvSpPr>
-          <p:cNvPr id="4" name="Rounded Rectangle 3"/>
+      <p:cxnSp>
+        <p:nvCxnSpPr>
+          <p:cNvPr id="4" name="Connector 3"/>
+          <p:cNvCxnSpPr/>
+          <p:nvPr/>
+        </p:nvCxnSpPr>
+        <p:spPr>
+          <a:xfrm>
+            <a:off x="5577840" y="800100"/>
+            <a:ext cx="2651760" cy="274320"/>
+          </a:xfrm>
+          <a:prstGeom prst="line">
+            <a:avLst/>
+          </a:prstGeom>
+          <a:ln w="12700">
+            <a:solidFill>
+              <a:srgbClr val="1A1A1A"/>
+            </a:solidFill>
+            <a:tailEnd type="triangle" w="med" len="med"/>
+          </a:ln>
+        </p:spPr>
+        <p:style>
+          <a:lnRef idx="2">
+            <a:schemeClr val="accent1"/>
+          </a:lnRef>
+          <a:fillRef idx="0">
+            <a:schemeClr val="accent1"/>
+          </a:fillRef>
+          <a:effectRef idx="1">
+            <a:schemeClr val="accent1"/>
+          </a:effectRef>
+          <a:fontRef idx="minor">
+            <a:schemeClr val="tx1"/>
+          </a:fontRef>
+        </p:style>
+      </p:cxnSp>
+      <p:sp>
+        <p:nvSpPr>
+          <p:cNvPr id="5" name="Rounded Rectangle 4"/>
           <p:cNvSpPr/>
           <p:nvPr/>
         </p:nvSpPr>
         <p:spPr>
           <a:xfrm>
-            <a:off x="2651760" y="868680"/>
-            <a:ext cx="5303520" cy="640080"/>
+            <a:off x="731520" y="1074420"/>
+            <a:ext cx="4389120" cy="594360"/>
+          </a:xfrm>
+          <a:prstGeom prst="roundRect">
+            <a:avLst/>
+          </a:prstGeom>
+          <a:solidFill>
+            <a:srgbClr val="F2F2F2"/>
+          </a:solidFill>
+          <a:ln w="12700">
+            <a:solidFill>
+              <a:srgbClr val="1A1A1A"/>
+            </a:solidFill>
+          </a:ln>
+        </p:spPr>
+        <p:style>
+          <a:lnRef idx="1">
+            <a:schemeClr val="accent1"/>
+          </a:lnRef>
+          <a:fillRef idx="3">
+            <a:schemeClr val="accent1"/>
+          </a:fillRef>
+          <a:effectRef idx="2">
+            <a:schemeClr val="accent1"/>
+          </a:effectRef>
+          <a:fontRef idx="minor">
+            <a:schemeClr val="lt1"/>
+          </a:fontRef>
+        </p:style>
+        <p:txBody>
+          <a:bodyPr rtlCol="0" anchor="ctr" wrap="square"/>
+          <a:lstStyle/>
+          <a:p>
+            <a:pPr algn="ctr"/>
+            <a:r>
+              <a:rPr sz="1300" b="1">
+                <a:solidFill>
+                  <a:srgbClr val="000000"/>
+                </a:solidFill>
+                <a:latin typeface="Arial"/>
+              </a:rPr>
+              <a:t>Cohort A — chronic-disease safety</a:t>
+            </a:r>
+          </a:p>
+        </p:txBody>
+      </p:sp>
+      <p:sp>
+        <p:nvSpPr>
+          <p:cNvPr id="6" name="Rounded Rectangle 5"/>
+          <p:cNvSpPr/>
+          <p:nvPr/>
+        </p:nvSpPr>
+        <p:spPr>
+          <a:xfrm>
+            <a:off x="6035040" y="1074420"/>
+            <a:ext cx="4389120" cy="594360"/>
+          </a:xfrm>
+          <a:prstGeom prst="roundRect">
+            <a:avLst/>
+          </a:prstGeom>
+          <a:solidFill>
+            <a:srgbClr val="F2F2F2"/>
+          </a:solidFill>
+          <a:ln w="12700">
+            <a:solidFill>
+              <a:srgbClr val="1A1A1A"/>
+            </a:solidFill>
+          </a:ln>
+        </p:spPr>
+        <p:style>
+          <a:lnRef idx="1">
+            <a:schemeClr val="accent1"/>
+          </a:lnRef>
+          <a:fillRef idx="3">
+            <a:schemeClr val="accent1"/>
+          </a:fillRef>
+          <a:effectRef idx="2">
+            <a:schemeClr val="accent1"/>
+          </a:effectRef>
+          <a:fontRef idx="minor">
+            <a:schemeClr val="lt1"/>
+          </a:fontRef>
+        </p:style>
+        <p:txBody>
+          <a:bodyPr rtlCol="0" anchor="ctr" wrap="square"/>
+          <a:lstStyle/>
+          <a:p>
+            <a:pPr algn="ctr"/>
+            <a:r>
+              <a:rPr sz="1300" b="1">
+                <a:solidFill>
+                  <a:srgbClr val="000000"/>
+                </a:solidFill>
+                <a:latin typeface="Arial"/>
+              </a:rPr>
+              <a:t>Cohort B — post-surgical efficacy</a:t>
+            </a:r>
+          </a:p>
+        </p:txBody>
+      </p:sp>
+      <p:cxnSp>
+        <p:nvCxnSpPr>
+          <p:cNvPr id="7" name="Connector 6"/>
+          <p:cNvCxnSpPr/>
+          <p:nvPr/>
+        </p:nvCxnSpPr>
+        <p:spPr>
+          <a:xfrm>
+            <a:off x="2926080" y="1668780"/>
+            <a:ext cx="0" cy="182880"/>
+          </a:xfrm>
+          <a:prstGeom prst="line">
+            <a:avLst/>
+          </a:prstGeom>
+          <a:ln w="12700">
+            <a:solidFill>
+              <a:srgbClr val="1A1A1A"/>
+            </a:solidFill>
+            <a:tailEnd type="triangle" w="med" len="med"/>
+          </a:ln>
+        </p:spPr>
+        <p:style>
+          <a:lnRef idx="2">
+            <a:schemeClr val="accent1"/>
+          </a:lnRef>
+          <a:fillRef idx="0">
+            <a:schemeClr val="accent1"/>
+          </a:fillRef>
+          <a:effectRef idx="1">
+            <a:schemeClr val="accent1"/>
+          </a:effectRef>
+          <a:fontRef idx="minor">
+            <a:schemeClr val="tx1"/>
+          </a:fontRef>
+        </p:style>
+      </p:cxnSp>
+      <p:sp>
+        <p:nvSpPr>
+          <p:cNvPr id="8" name="Rounded Rectangle 7"/>
+          <p:cNvSpPr/>
+          <p:nvPr/>
+        </p:nvSpPr>
+        <p:spPr>
+          <a:xfrm>
+            <a:off x="731520" y="1851660"/>
+            <a:ext cx="4389120" cy="777240"/>
           </a:xfrm>
           <a:prstGeom prst="roundRect">
             <a:avLst/>
@@ -3228,44 +3408,44 @@
           </a:fontRef>
         </p:style>
         <p:txBody>
-          <a:bodyPr rtlCol="0" anchor="ctr" wrap="square" tIns="54864" bIns="54864"/>
+          <a:bodyPr rtlCol="0" anchor="ctr" wrap="square"/>
           <a:lstStyle/>
           <a:p>
             <a:pPr algn="ctr"/>
             <a:r>
-              <a:rPr sz="1400" b="0">
+              <a:rPr sz="1200" b="0">
                 <a:solidFill>
                   <a:srgbClr val="000000"/>
                 </a:solidFill>
                 <a:latin typeface="Arial"/>
               </a:rPr>
-              <a:t>HPV vaccine prescription ascertained</a:t>
+              <a:t>HPV-vaccine status ascertained</a:t>
             </a:r>
           </a:p>
           <a:p>
             <a:pPr algn="ctr"/>
             <a:r>
-              <a:rPr sz="1300" b="0">
+              <a:rPr sz="1100" b="0">
                 <a:solidFill>
                   <a:srgbClr val="000000"/>
                 </a:solidFill>
                 <a:latin typeface="Arial"/>
               </a:rPr>
-              <a:t>Vaccinated 2,156        Unvaccinated 30,813</a:t>
+              <a:t>Vaccinated 2,156   Unvaccinated 30,813</a:t>
             </a:r>
           </a:p>
         </p:txBody>
       </p:sp>
       <p:cxnSp>
         <p:nvCxnSpPr>
-          <p:cNvPr id="5" name="Connector 4"/>
+          <p:cNvPr id="9" name="Connector 8"/>
           <p:cNvCxnSpPr/>
           <p:nvPr/>
         </p:nvCxnSpPr>
         <p:spPr>
-          <a:xfrm flipH="1">
-            <a:off x="2743200" y="1508760"/>
-            <a:ext cx="2560320" cy="182880"/>
+          <a:xfrm>
+            <a:off x="2926080" y="2628900"/>
+            <a:ext cx="0" cy="137160"/>
           </a:xfrm>
           <a:prstGeom prst="line">
             <a:avLst/>
@@ -3292,186 +3472,6 @@
           </a:fontRef>
         </p:style>
       </p:cxnSp>
-      <p:cxnSp>
-        <p:nvCxnSpPr>
-          <p:cNvPr id="6" name="Connector 5"/>
-          <p:cNvCxnSpPr/>
-          <p:nvPr/>
-        </p:nvCxnSpPr>
-        <p:spPr>
-          <a:xfrm>
-            <a:off x="5303520" y="1508760"/>
-            <a:ext cx="2560320" cy="182880"/>
-          </a:xfrm>
-          <a:prstGeom prst="line">
-            <a:avLst/>
-          </a:prstGeom>
-          <a:ln w="12700">
-            <a:solidFill>
-              <a:srgbClr val="1A1A1A"/>
-            </a:solidFill>
-            <a:tailEnd type="triangle" w="med" len="med"/>
-          </a:ln>
-        </p:spPr>
-        <p:style>
-          <a:lnRef idx="2">
-            <a:schemeClr val="accent1"/>
-          </a:lnRef>
-          <a:fillRef idx="0">
-            <a:schemeClr val="accent1"/>
-          </a:fillRef>
-          <a:effectRef idx="1">
-            <a:schemeClr val="accent1"/>
-          </a:effectRef>
-          <a:fontRef idx="minor">
-            <a:schemeClr val="tx1"/>
-          </a:fontRef>
-        </p:style>
-      </p:cxnSp>
-      <p:sp>
-        <p:nvSpPr>
-          <p:cNvPr id="7" name="Rounded Rectangle 6"/>
-          <p:cNvSpPr/>
-          <p:nvPr/>
-        </p:nvSpPr>
-        <p:spPr>
-          <a:xfrm>
-            <a:off x="594359" y="1691640"/>
-            <a:ext cx="4297680" cy="640080"/>
-          </a:xfrm>
-          <a:prstGeom prst="roundRect">
-            <a:avLst/>
-          </a:prstGeom>
-          <a:solidFill>
-            <a:srgbClr val="F2F2F2"/>
-          </a:solidFill>
-          <a:ln w="12700">
-            <a:solidFill>
-              <a:srgbClr val="1A1A1A"/>
-            </a:solidFill>
-          </a:ln>
-        </p:spPr>
-        <p:style>
-          <a:lnRef idx="1">
-            <a:schemeClr val="accent1"/>
-          </a:lnRef>
-          <a:fillRef idx="3">
-            <a:schemeClr val="accent1"/>
-          </a:fillRef>
-          <a:effectRef idx="2">
-            <a:schemeClr val="accent1"/>
-          </a:effectRef>
-          <a:fontRef idx="minor">
-            <a:schemeClr val="lt1"/>
-          </a:fontRef>
-        </p:style>
-        <p:txBody>
-          <a:bodyPr rtlCol="0" anchor="ctr" wrap="square" tIns="54864" bIns="54864"/>
-          <a:lstStyle/>
-          <a:p>
-            <a:pPr algn="ctr"/>
-            <a:r>
-              <a:rPr sz="1500" b="1">
-                <a:solidFill>
-                  <a:srgbClr val="000000"/>
-                </a:solidFill>
-                <a:latin typeface="Arial"/>
-              </a:rPr>
-              <a:t>Cohort A — chronic-disease safety</a:t>
-            </a:r>
-          </a:p>
-        </p:txBody>
-      </p:sp>
-      <p:sp>
-        <p:nvSpPr>
-          <p:cNvPr id="8" name="Rounded Rectangle 7"/>
-          <p:cNvSpPr/>
-          <p:nvPr/>
-        </p:nvSpPr>
-        <p:spPr>
-          <a:xfrm>
-            <a:off x="5715000" y="1691640"/>
-            <a:ext cx="4297680" cy="640080"/>
-          </a:xfrm>
-          <a:prstGeom prst="roundRect">
-            <a:avLst/>
-          </a:prstGeom>
-          <a:solidFill>
-            <a:srgbClr val="F2F2F2"/>
-          </a:solidFill>
-          <a:ln w="12700">
-            <a:solidFill>
-              <a:srgbClr val="1A1A1A"/>
-            </a:solidFill>
-          </a:ln>
-        </p:spPr>
-        <p:style>
-          <a:lnRef idx="1">
-            <a:schemeClr val="accent1"/>
-          </a:lnRef>
-          <a:fillRef idx="3">
-            <a:schemeClr val="accent1"/>
-          </a:fillRef>
-          <a:effectRef idx="2">
-            <a:schemeClr val="accent1"/>
-          </a:effectRef>
-          <a:fontRef idx="minor">
-            <a:schemeClr val="lt1"/>
-          </a:fontRef>
-        </p:style>
-        <p:txBody>
-          <a:bodyPr rtlCol="0" anchor="ctr" wrap="square" tIns="54864" bIns="54864"/>
-          <a:lstStyle/>
-          <a:p>
-            <a:pPr algn="ctr"/>
-            <a:r>
-              <a:rPr sz="1500" b="1">
-                <a:solidFill>
-                  <a:srgbClr val="000000"/>
-                </a:solidFill>
-                <a:latin typeface="Arial"/>
-              </a:rPr>
-              <a:t>Cohort B — post-surgical efficacy</a:t>
-            </a:r>
-          </a:p>
-        </p:txBody>
-      </p:sp>
-      <p:cxnSp>
-        <p:nvCxnSpPr>
-          <p:cNvPr id="9" name="Connector 8"/>
-          <p:cNvCxnSpPr/>
-          <p:nvPr/>
-        </p:nvCxnSpPr>
-        <p:spPr>
-          <a:xfrm>
-            <a:off x="2743200" y="2331720"/>
-            <a:ext cx="0" cy="182880"/>
-          </a:xfrm>
-          <a:prstGeom prst="line">
-            <a:avLst/>
-          </a:prstGeom>
-          <a:ln w="12700">
-            <a:solidFill>
-              <a:srgbClr val="1A1A1A"/>
-            </a:solidFill>
-            <a:tailEnd type="triangle" w="med" len="med"/>
-          </a:ln>
-        </p:spPr>
-        <p:style>
-          <a:lnRef idx="2">
-            <a:schemeClr val="accent1"/>
-          </a:lnRef>
-          <a:fillRef idx="0">
-            <a:schemeClr val="accent1"/>
-          </a:fillRef>
-          <a:effectRef idx="1">
-            <a:schemeClr val="accent1"/>
-          </a:effectRef>
-          <a:fontRef idx="minor">
-            <a:schemeClr val="tx1"/>
-          </a:fontRef>
-        </p:style>
-      </p:cxnSp>
       <p:sp>
         <p:nvSpPr>
           <p:cNvPr id="10" name="Rounded Rectangle 9"/>
@@ -3480,8 +3480,8 @@
         </p:nvSpPr>
         <p:spPr>
           <a:xfrm>
-            <a:off x="594359" y="2514600"/>
-            <a:ext cx="4297680" cy="640080"/>
+            <a:off x="731520" y="2766060"/>
+            <a:ext cx="4389120" cy="777240"/>
           </a:xfrm>
           <a:prstGeom prst="roundRect">
             <a:avLst/>
@@ -3510,20 +3510,8 @@
           </a:fontRef>
         </p:style>
         <p:txBody>
-          <a:bodyPr rtlCol="0" anchor="ctr" wrap="square" tIns="54864" bIns="54864"/>
-          <a:lstStyle/>
-          <a:p>
-            <a:pPr algn="ctr"/>
-            <a:r>
-              <a:rPr sz="1300" b="0">
-                <a:solidFill>
-                  <a:srgbClr val="000000"/>
-                </a:solidFill>
-                <a:latin typeface="Arial"/>
-              </a:rPr>
-              <a:t>Eligibility (index date ≤ 31 Dec 2024)</a:t>
-            </a:r>
-          </a:p>
+          <a:bodyPr rtlCol="0" anchor="ctr" wrap="square"/>
+          <a:lstStyle/>
           <a:p>
             <a:pPr algn="ctr"/>
             <a:r>
@@ -3533,7 +3521,19 @@
                 </a:solidFill>
                 <a:latin typeface="Arial"/>
               </a:rPr>
-              <a:t>Pseudo-index assigned to unvaccinated controls</a:t>
+              <a:t>1:1 propensity-score matching</a:t>
+            </a:r>
+          </a:p>
+          <a:p>
+            <a:pPr algn="ctr"/>
+            <a:r>
+              <a:rPr sz="1100" b="0">
+                <a:solidFill>
+                  <a:srgbClr val="000000"/>
+                </a:solidFill>
+                <a:latin typeface="Arial"/>
+              </a:rPr>
+              <a:t>(age, BMI, BP, smoking, residence)</a:t>
             </a:r>
           </a:p>
         </p:txBody>
@@ -3546,8 +3546,8 @@
         </p:nvCxnSpPr>
         <p:spPr>
           <a:xfrm>
-            <a:off x="2743200" y="3154680"/>
-            <a:ext cx="0" cy="251460"/>
+            <a:off x="2926080" y="3543300"/>
+            <a:ext cx="0" cy="137160"/>
           </a:xfrm>
           <a:prstGeom prst="line">
             <a:avLst/>
@@ -3582,8 +3582,8 @@
         </p:nvSpPr>
         <p:spPr>
           <a:xfrm>
-            <a:off x="594359" y="3406140"/>
-            <a:ext cx="4297680" cy="868680"/>
+            <a:off x="731520" y="3680460"/>
+            <a:ext cx="4389120" cy="777240"/>
           </a:xfrm>
           <a:prstGeom prst="roundRect">
             <a:avLst/>
@@ -3612,20 +3612,8 @@
           </a:fontRef>
         </p:style>
         <p:txBody>
-          <a:bodyPr rtlCol="0" anchor="ctr" wrap="square" tIns="54864" bIns="54864"/>
-          <a:lstStyle/>
-          <a:p>
-            <a:pPr algn="ctr"/>
-            <a:r>
-              <a:rPr sz="1300" b="0">
-                <a:solidFill>
-                  <a:srgbClr val="000000"/>
-                </a:solidFill>
-                <a:latin typeface="Arial"/>
-              </a:rPr>
-              <a:t>1:1 propensity-score matching</a:t>
-            </a:r>
-          </a:p>
+          <a:bodyPr rtlCol="0" anchor="ctr" wrap="square"/>
+          <a:lstStyle/>
           <a:p>
             <a:pPr algn="ctr"/>
             <a:r>
@@ -3635,31 +3623,19 @@
                 </a:solidFill>
                 <a:latin typeface="Arial"/>
               </a:rPr>
-              <a:t>(caliper 0.2 × SD of logit PS)</a:t>
+              <a:t>Primary exposure filter</a:t>
             </a:r>
           </a:p>
           <a:p>
             <a:pPr algn="ctr"/>
             <a:r>
-              <a:rPr sz="1200" b="0">
+              <a:rPr sz="1100" b="0">
                 <a:solidFill>
                   <a:srgbClr val="000000"/>
                 </a:solidFill>
                 <a:latin typeface="Arial"/>
               </a:rPr>
-              <a:t>+ ≥2 doses + 3-month landmark</a:t>
-            </a:r>
-          </a:p>
-          <a:p>
-            <a:pPr algn="ctr"/>
-            <a:r>
-              <a:rPr sz="1200" b="0">
-                <a:solidFill>
-                  <a:srgbClr val="000000"/>
-                </a:solidFill>
-                <a:latin typeface="Arial"/>
-              </a:rPr>
-              <a:t>(matched-pair integrity preserved)</a:t>
+              <a:t>≥2 doses + 3-month landmark</a:t>
             </a:r>
           </a:p>
         </p:txBody>
@@ -3672,8 +3648,8 @@
         </p:nvCxnSpPr>
         <p:spPr>
           <a:xfrm>
-            <a:off x="2743200" y="4274820"/>
-            <a:ext cx="0" cy="274320"/>
+            <a:off x="2926080" y="4457700"/>
+            <a:ext cx="0" cy="22860"/>
           </a:xfrm>
           <a:prstGeom prst="line">
             <a:avLst/>
@@ -3708,8 +3684,8 @@
         </p:nvSpPr>
         <p:spPr>
           <a:xfrm>
-            <a:off x="594359" y="4549140"/>
-            <a:ext cx="4297680" cy="1508760"/>
+            <a:off x="731520" y="4480560"/>
+            <a:ext cx="4389120" cy="1097280"/>
           </a:xfrm>
           <a:prstGeom prst="roundRect">
             <a:avLst/>
@@ -3738,18 +3714,18 @@
           </a:fontRef>
         </p:style>
         <p:txBody>
-          <a:bodyPr rtlCol="0" anchor="ctr" wrap="square" tIns="54864" bIns="54864"/>
+          <a:bodyPr rtlCol="0" anchor="ctr" wrap="square"/>
           <a:lstStyle/>
           <a:p>
             <a:pPr algn="ctr"/>
             <a:r>
-              <a:rPr sz="1400" b="1">
+              <a:rPr sz="1300" b="1">
                 <a:solidFill>
                   <a:srgbClr val="000000"/>
                 </a:solidFill>
                 <a:latin typeface="Arial"/>
               </a:rPr>
-              <a:t>Final analytic Cohort A   n = 2,776</a:t>
+              <a:t>Final analytic Cohort A</a:t>
             </a:r>
           </a:p>
           <a:p>
@@ -3761,7 +3737,7 @@
                 </a:solidFill>
                 <a:latin typeface="Arial"/>
               </a:rPr>
-              <a:t/>
+              <a:t>n = 2,776</a:t>
             </a:r>
           </a:p>
           <a:p>
@@ -3773,43 +3749,7 @@
                 </a:solidFill>
                 <a:latin typeface="Arial"/>
               </a:rPr>
-              <a:t>Vaccinated 1,396</a:t>
-            </a:r>
-          </a:p>
-          <a:p>
-            <a:pPr algn="ctr"/>
-            <a:r>
-              <a:rPr sz="1200" b="0">
-                <a:solidFill>
-                  <a:srgbClr val="000000"/>
-                </a:solidFill>
-                <a:latin typeface="Arial"/>
-              </a:rPr>
-              <a:t>Unvaccinated 1,380</a:t>
-            </a:r>
-          </a:p>
-          <a:p>
-            <a:pPr algn="ctr"/>
-            <a:r>
-              <a:rPr sz="1200" b="0">
-                <a:solidFill>
-                  <a:srgbClr val="000000"/>
-                </a:solidFill>
-                <a:latin typeface="Arial"/>
-              </a:rPr>
-              <a:t/>
-            </a:r>
-          </a:p>
-          <a:p>
-            <a:pPr algn="ctr"/>
-            <a:r>
-              <a:rPr sz="1200" b="0">
-                <a:solidFill>
-                  <a:srgbClr val="000000"/>
-                </a:solidFill>
-                <a:latin typeface="Arial"/>
-              </a:rPr>
-              <a:t>Outcomes: 5 chronic conditions + composites</a:t>
+              <a:t>Vaccinated 1,396  /  Unvaccinated 1,380</a:t>
             </a:r>
           </a:p>
         </p:txBody>
@@ -3822,7 +3762,7 @@
         </p:nvCxnSpPr>
         <p:spPr>
           <a:xfrm>
-            <a:off x="7863840" y="2331720"/>
+            <a:off x="8229600" y="1668780"/>
             <a:ext cx="0" cy="182880"/>
           </a:xfrm>
           <a:prstGeom prst="line">
@@ -3858,8 +3798,8 @@
         </p:nvSpPr>
         <p:spPr>
           <a:xfrm>
-            <a:off x="5715000" y="2514600"/>
-            <a:ext cx="4297680" cy="640080"/>
+            <a:off x="6035040" y="1851660"/>
+            <a:ext cx="4389120" cy="777240"/>
           </a:xfrm>
           <a:prstGeom prst="roundRect">
             <a:avLst/>
@@ -3888,12 +3828,12 @@
           </a:fontRef>
         </p:style>
         <p:txBody>
-          <a:bodyPr rtlCol="0" anchor="ctr" wrap="square" tIns="54864" bIns="54864"/>
+          <a:bodyPr rtlCol="0" anchor="ctr" wrap="square"/>
           <a:lstStyle/>
           <a:p>
             <a:pPr algn="ctr"/>
             <a:r>
-              <a:rPr sz="1300" b="0">
+              <a:rPr sz="1200" b="0">
                 <a:solidFill>
                   <a:srgbClr val="000000"/>
                 </a:solidFill>
@@ -3905,13 +3845,13 @@
           <a:p>
             <a:pPr algn="ctr"/>
             <a:r>
-              <a:rPr sz="1200" b="0">
+              <a:rPr sz="1100" b="0">
                 <a:solidFill>
                   <a:srgbClr val="000000"/>
                 </a:solidFill>
                 <a:latin typeface="Arial"/>
               </a:rPr>
-              <a:t>n = 6,890       Eligibility index date ≤ 31 Dec 2024</a:t>
+              <a:t>n = 6,890</a:t>
             </a:r>
           </a:p>
         </p:txBody>
@@ -3924,8 +3864,8 @@
         </p:nvCxnSpPr>
         <p:spPr>
           <a:xfrm>
-            <a:off x="7863840" y="3154680"/>
-            <a:ext cx="0" cy="251460"/>
+            <a:off x="8229600" y="2628900"/>
+            <a:ext cx="0" cy="137160"/>
           </a:xfrm>
           <a:prstGeom prst="line">
             <a:avLst/>
@@ -3960,8 +3900,8 @@
         </p:nvSpPr>
         <p:spPr>
           <a:xfrm>
-            <a:off x="5715000" y="3406140"/>
-            <a:ext cx="4297680" cy="868680"/>
+            <a:off x="6035040" y="2766060"/>
+            <a:ext cx="4389120" cy="777240"/>
           </a:xfrm>
           <a:prstGeom prst="roundRect">
             <a:avLst/>
@@ -3990,20 +3930,8 @@
           </a:fontRef>
         </p:style>
         <p:txBody>
-          <a:bodyPr rtlCol="0" anchor="ctr" wrap="square" tIns="54864" bIns="54864"/>
-          <a:lstStyle/>
-          <a:p>
-            <a:pPr algn="ctr"/>
-            <a:r>
-              <a:rPr sz="1300" b="0">
-                <a:solidFill>
-                  <a:srgbClr val="000000"/>
-                </a:solidFill>
-                <a:latin typeface="Arial"/>
-              </a:rPr>
-              <a:t>Variable-ratio matching</a:t>
-            </a:r>
-          </a:p>
+          <a:bodyPr rtlCol="0" anchor="ctr" wrap="square"/>
+          <a:lstStyle/>
           <a:p>
             <a:pPr algn="ctr"/>
             <a:r>
@@ -4013,31 +3941,19 @@
                 </a:solidFill>
                 <a:latin typeface="Arial"/>
               </a:rPr>
-              <a:t>(1:up-to-5 then 1:up-to-4 fine matching)</a:t>
+              <a:t>Post-surgery HPV-vaccine status</a:t>
             </a:r>
           </a:p>
           <a:p>
             <a:pPr algn="ctr"/>
             <a:r>
-              <a:rPr sz="1200" b="0">
+              <a:rPr sz="1100" b="0">
                 <a:solidFill>
                   <a:srgbClr val="000000"/>
                 </a:solidFill>
                 <a:latin typeface="Arial"/>
               </a:rPr>
-              <a:t>+ ≥2 doses + 3-month landmark</a:t>
-            </a:r>
-          </a:p>
-          <a:p>
-            <a:pPr algn="ctr"/>
-            <a:r>
-              <a:rPr sz="1200" b="0">
-                <a:solidFill>
-                  <a:srgbClr val="000000"/>
-                </a:solidFill>
-                <a:latin typeface="Arial"/>
-              </a:rPr>
-              <a:t>(matched-set integrity preserved)</a:t>
+              <a:t>(vaccinated after surgery vs never)</a:t>
             </a:r>
           </a:p>
         </p:txBody>
@@ -4050,8 +3966,8 @@
         </p:nvCxnSpPr>
         <p:spPr>
           <a:xfrm>
-            <a:off x="7863840" y="4274820"/>
-            <a:ext cx="0" cy="274320"/>
+            <a:off x="8229600" y="3543300"/>
+            <a:ext cx="0" cy="137160"/>
           </a:xfrm>
           <a:prstGeom prst="line">
             <a:avLst/>
@@ -4086,8 +4002,212 @@
         </p:nvSpPr>
         <p:spPr>
           <a:xfrm>
-            <a:off x="5715000" y="4549140"/>
-            <a:ext cx="4297680" cy="1508760"/>
+            <a:off x="6035040" y="3680460"/>
+            <a:ext cx="4389120" cy="777240"/>
+          </a:xfrm>
+          <a:prstGeom prst="roundRect">
+            <a:avLst/>
+          </a:prstGeom>
+          <a:solidFill>
+            <a:srgbClr val="FFFFFF"/>
+          </a:solidFill>
+          <a:ln w="12700">
+            <a:solidFill>
+              <a:srgbClr val="1A1A1A"/>
+            </a:solidFill>
+          </a:ln>
+        </p:spPr>
+        <p:style>
+          <a:lnRef idx="1">
+            <a:schemeClr val="accent1"/>
+          </a:lnRef>
+          <a:fillRef idx="3">
+            <a:schemeClr val="accent1"/>
+          </a:fillRef>
+          <a:effectRef idx="2">
+            <a:schemeClr val="accent1"/>
+          </a:effectRef>
+          <a:fontRef idx="minor">
+            <a:schemeClr val="lt1"/>
+          </a:fontRef>
+        </p:style>
+        <p:txBody>
+          <a:bodyPr rtlCol="0" anchor="ctr" wrap="square"/>
+          <a:lstStyle/>
+          <a:p>
+            <a:pPr algn="ctr"/>
+            <a:r>
+              <a:rPr sz="1200" b="0">
+                <a:solidFill>
+                  <a:srgbClr val="000000"/>
+                </a:solidFill>
+                <a:latin typeface="Arial"/>
+              </a:rPr>
+              <a:t>1:4 matching</a:t>
+            </a:r>
+          </a:p>
+          <a:p>
+            <a:pPr algn="ctr"/>
+            <a:r>
+              <a:rPr sz="1100" b="0">
+                <a:solidFill>
+                  <a:srgbClr val="000000"/>
+                </a:solidFill>
+                <a:latin typeface="Arial"/>
+              </a:rPr>
+              <a:t>(surgery method/year/age, BMI)</a:t>
+            </a:r>
+          </a:p>
+        </p:txBody>
+      </p:sp>
+      <p:cxnSp>
+        <p:nvCxnSpPr>
+          <p:cNvPr id="21" name="Connector 20"/>
+          <p:cNvCxnSpPr/>
+          <p:nvPr/>
+        </p:nvCxnSpPr>
+        <p:spPr>
+          <a:xfrm>
+            <a:off x="8229600" y="4457700"/>
+            <a:ext cx="0" cy="137160"/>
+          </a:xfrm>
+          <a:prstGeom prst="line">
+            <a:avLst/>
+          </a:prstGeom>
+          <a:ln w="12700">
+            <a:solidFill>
+              <a:srgbClr val="1A1A1A"/>
+            </a:solidFill>
+            <a:tailEnd type="triangle" w="med" len="med"/>
+          </a:ln>
+        </p:spPr>
+        <p:style>
+          <a:lnRef idx="2">
+            <a:schemeClr val="accent1"/>
+          </a:lnRef>
+          <a:fillRef idx="0">
+            <a:schemeClr val="accent1"/>
+          </a:fillRef>
+          <a:effectRef idx="1">
+            <a:schemeClr val="accent1"/>
+          </a:effectRef>
+          <a:fontRef idx="minor">
+            <a:schemeClr val="tx1"/>
+          </a:fontRef>
+        </p:style>
+      </p:cxnSp>
+      <p:sp>
+        <p:nvSpPr>
+          <p:cNvPr id="22" name="Rounded Rectangle 21"/>
+          <p:cNvSpPr/>
+          <p:nvPr/>
+        </p:nvSpPr>
+        <p:spPr>
+          <a:xfrm>
+            <a:off x="6035040" y="4594860"/>
+            <a:ext cx="4389120" cy="777240"/>
+          </a:xfrm>
+          <a:prstGeom prst="roundRect">
+            <a:avLst/>
+          </a:prstGeom>
+          <a:solidFill>
+            <a:srgbClr val="FFFFFF"/>
+          </a:solidFill>
+          <a:ln w="12700">
+            <a:solidFill>
+              <a:srgbClr val="1A1A1A"/>
+            </a:solidFill>
+          </a:ln>
+        </p:spPr>
+        <p:style>
+          <a:lnRef idx="1">
+            <a:schemeClr val="accent1"/>
+          </a:lnRef>
+          <a:fillRef idx="3">
+            <a:schemeClr val="accent1"/>
+          </a:fillRef>
+          <a:effectRef idx="2">
+            <a:schemeClr val="accent1"/>
+          </a:effectRef>
+          <a:fontRef idx="minor">
+            <a:schemeClr val="lt1"/>
+          </a:fontRef>
+        </p:style>
+        <p:txBody>
+          <a:bodyPr rtlCol="0" anchor="ctr" wrap="square"/>
+          <a:lstStyle/>
+          <a:p>
+            <a:pPr algn="ctr"/>
+            <a:r>
+              <a:rPr sz="1200" b="0">
+                <a:solidFill>
+                  <a:srgbClr val="000000"/>
+                </a:solidFill>
+                <a:latin typeface="Arial"/>
+              </a:rPr>
+              <a:t>Primary exposure filter</a:t>
+            </a:r>
+          </a:p>
+          <a:p>
+            <a:pPr algn="ctr"/>
+            <a:r>
+              <a:rPr sz="1100" b="0">
+                <a:solidFill>
+                  <a:srgbClr val="000000"/>
+                </a:solidFill>
+                <a:latin typeface="Arial"/>
+              </a:rPr>
+              <a:t>≥2 doses + 3-month landmark</a:t>
+            </a:r>
+          </a:p>
+        </p:txBody>
+      </p:sp>
+      <p:cxnSp>
+        <p:nvCxnSpPr>
+          <p:cNvPr id="23" name="Connector 22"/>
+          <p:cNvCxnSpPr/>
+          <p:nvPr/>
+        </p:nvCxnSpPr>
+        <p:spPr>
+          <a:xfrm>
+            <a:off x="8229600" y="5372100"/>
+            <a:ext cx="0" cy="68580"/>
+          </a:xfrm>
+          <a:prstGeom prst="line">
+            <a:avLst/>
+          </a:prstGeom>
+          <a:ln w="12700">
+            <a:solidFill>
+              <a:srgbClr val="1A1A1A"/>
+            </a:solidFill>
+            <a:tailEnd type="triangle" w="med" len="med"/>
+          </a:ln>
+        </p:spPr>
+        <p:style>
+          <a:lnRef idx="2">
+            <a:schemeClr val="accent1"/>
+          </a:lnRef>
+          <a:fillRef idx="0">
+            <a:schemeClr val="accent1"/>
+          </a:fillRef>
+          <a:effectRef idx="1">
+            <a:schemeClr val="accent1"/>
+          </a:effectRef>
+          <a:fontRef idx="minor">
+            <a:schemeClr val="tx1"/>
+          </a:fontRef>
+        </p:style>
+      </p:cxnSp>
+      <p:sp>
+        <p:nvSpPr>
+          <p:cNvPr id="24" name="Rounded Rectangle 23"/>
+          <p:cNvSpPr/>
+          <p:nvPr/>
+        </p:nvSpPr>
+        <p:spPr>
+          <a:xfrm>
+            <a:off x="6035040" y="5440680"/>
+            <a:ext cx="4389120" cy="1097280"/>
           </a:xfrm>
           <a:prstGeom prst="roundRect">
             <a:avLst/>
@@ -4116,18 +4236,18 @@
           </a:fontRef>
         </p:style>
         <p:txBody>
-          <a:bodyPr rtlCol="0" anchor="ctr" wrap="square" tIns="54864" bIns="54864"/>
+          <a:bodyPr rtlCol="0" anchor="ctr" wrap="square"/>
           <a:lstStyle/>
           <a:p>
             <a:pPr algn="ctr"/>
             <a:r>
-              <a:rPr sz="1400" b="1">
+              <a:rPr sz="1300" b="1">
                 <a:solidFill>
                   <a:srgbClr val="000000"/>
                 </a:solidFill>
                 <a:latin typeface="Arial"/>
               </a:rPr>
-              <a:t>Final analytic Cohort B   n = 912</a:t>
+              <a:t>Final analytic Cohort B</a:t>
             </a:r>
           </a:p>
           <a:p>
@@ -4139,7 +4259,7 @@
                 </a:solidFill>
                 <a:latin typeface="Arial"/>
               </a:rPr>
-              <a:t/>
+              <a:t>n = 912</a:t>
             </a:r>
           </a:p>
           <a:p>
@@ -4151,43 +4271,7 @@
                 </a:solidFill>
                 <a:latin typeface="Arial"/>
               </a:rPr>
-              <a:t>Vaccinated 203</a:t>
-            </a:r>
-          </a:p>
-          <a:p>
-            <a:pPr algn="ctr"/>
-            <a:r>
-              <a:rPr sz="1200" b="0">
-                <a:solidFill>
-                  <a:srgbClr val="000000"/>
-                </a:solidFill>
-                <a:latin typeface="Arial"/>
-              </a:rPr>
-              <a:t>Unvaccinated 709</a:t>
-            </a:r>
-          </a:p>
-          <a:p>
-            <a:pPr algn="ctr"/>
-            <a:r>
-              <a:rPr sz="1200" b="0">
-                <a:solidFill>
-                  <a:srgbClr val="000000"/>
-                </a:solidFill>
-                <a:latin typeface="Arial"/>
-              </a:rPr>
-              <a:t/>
-            </a:r>
-          </a:p>
-          <a:p>
-            <a:pPr algn="ctr"/>
-            <a:r>
-              <a:rPr sz="1200" b="0">
-                <a:solidFill>
-                  <a:srgbClr val="000000"/>
-                </a:solidFill>
-                <a:latin typeface="Arial"/>
-              </a:rPr>
-              <a:t>Outcomes: lesion recurrence; hr-HPV clearance</a:t>
+              <a:t>Vaccinated 203  /  Unvaccinated 709</a:t>
             </a:r>
           </a:p>
         </p:txBody>
